--- a/courses/ooad/sessions/s10.pptx
+++ b/courses/ooad/sessions/s10.pptx
@@ -419,7 +419,7 @@
   </p:cSld>
   <p:clrMap bg1="lt1" tx1="dk1" bg2="lt2" tx2="dk2" accent1="accent1" accent2="accent2" accent3="accent3" accent4="accent4" accent5="accent5" accent6="accent6" hlink="hlink" folHlink="folHlink"/>
   <p:notesStyle>
-    <a:lvl1pPr marL="0" algn="l" defTabSz="914400" rtl="0" eaLnBrk="1" latinLnBrk="1" hangingPunct="1">
+    <a:lvl1pPr marL="0" algn="l" defTabSz="914400" rtl="0" eaLnBrk="1" latinLnBrk="0" hangingPunct="1">
       <a:defRPr sz="1200" kern="1200">
         <a:solidFill>
           <a:schemeClr val="tx1"/>
@@ -429,7 +429,7 @@
         <a:cs typeface="+mn-cs"/>
       </a:defRPr>
     </a:lvl1pPr>
-    <a:lvl2pPr marL="457200" algn="l" defTabSz="914400" rtl="0" eaLnBrk="1" latinLnBrk="1" hangingPunct="1">
+    <a:lvl2pPr marL="457200" algn="l" defTabSz="914400" rtl="0" eaLnBrk="1" latinLnBrk="0" hangingPunct="1">
       <a:defRPr sz="1200" kern="1200">
         <a:solidFill>
           <a:schemeClr val="tx1"/>
@@ -439,7 +439,7 @@
         <a:cs typeface="+mn-cs"/>
       </a:defRPr>
     </a:lvl2pPr>
-    <a:lvl3pPr marL="914400" algn="l" defTabSz="914400" rtl="0" eaLnBrk="1" latinLnBrk="1" hangingPunct="1">
+    <a:lvl3pPr marL="914400" algn="l" defTabSz="914400" rtl="0" eaLnBrk="1" latinLnBrk="0" hangingPunct="1">
       <a:defRPr sz="1200" kern="1200">
         <a:solidFill>
           <a:schemeClr val="tx1"/>
@@ -449,7 +449,7 @@
         <a:cs typeface="+mn-cs"/>
       </a:defRPr>
     </a:lvl3pPr>
-    <a:lvl4pPr marL="1371600" algn="l" defTabSz="914400" rtl="0" eaLnBrk="1" latinLnBrk="1" hangingPunct="1">
+    <a:lvl4pPr marL="1371600" algn="l" defTabSz="914400" rtl="0" eaLnBrk="1" latinLnBrk="0" hangingPunct="1">
       <a:defRPr sz="1200" kern="1200">
         <a:solidFill>
           <a:schemeClr val="tx1"/>
@@ -459,7 +459,7 @@
         <a:cs typeface="+mn-cs"/>
       </a:defRPr>
     </a:lvl4pPr>
-    <a:lvl5pPr marL="1828800" algn="l" defTabSz="914400" rtl="0" eaLnBrk="1" latinLnBrk="1" hangingPunct="1">
+    <a:lvl5pPr marL="1828800" algn="l" defTabSz="914400" rtl="0" eaLnBrk="1" latinLnBrk="0" hangingPunct="1">
       <a:defRPr sz="1200" kern="1200">
         <a:solidFill>
           <a:schemeClr val="tx1"/>
@@ -469,7 +469,7 @@
         <a:cs typeface="+mn-cs"/>
       </a:defRPr>
     </a:lvl5pPr>
-    <a:lvl6pPr marL="2286000" algn="l" defTabSz="914400" rtl="0" eaLnBrk="1" latinLnBrk="1" hangingPunct="1">
+    <a:lvl6pPr marL="2286000" algn="l" defTabSz="914400" rtl="0" eaLnBrk="1" latinLnBrk="0" hangingPunct="1">
       <a:defRPr sz="1200" kern="1200">
         <a:solidFill>
           <a:schemeClr val="tx1"/>
@@ -479,7 +479,7 @@
         <a:cs typeface="+mn-cs"/>
       </a:defRPr>
     </a:lvl6pPr>
-    <a:lvl7pPr marL="2743200" algn="l" defTabSz="914400" rtl="0" eaLnBrk="1" latinLnBrk="1" hangingPunct="1">
+    <a:lvl7pPr marL="2743200" algn="l" defTabSz="914400" rtl="0" eaLnBrk="1" latinLnBrk="0" hangingPunct="1">
       <a:defRPr sz="1200" kern="1200">
         <a:solidFill>
           <a:schemeClr val="tx1"/>
@@ -489,7 +489,7 @@
         <a:cs typeface="+mn-cs"/>
       </a:defRPr>
     </a:lvl7pPr>
-    <a:lvl8pPr marL="3200400" algn="l" defTabSz="914400" rtl="0" eaLnBrk="1" latinLnBrk="1" hangingPunct="1">
+    <a:lvl8pPr marL="3200400" algn="l" defTabSz="914400" rtl="0" eaLnBrk="1" latinLnBrk="0" hangingPunct="1">
       <a:defRPr sz="1200" kern="1200">
         <a:solidFill>
           <a:schemeClr val="tx1"/>
@@ -499,7 +499,7 @@
         <a:cs typeface="+mn-cs"/>
       </a:defRPr>
     </a:lvl8pPr>
-    <a:lvl9pPr marL="3657600" algn="l" defTabSz="914400" rtl="0" eaLnBrk="1" latinLnBrk="1" hangingPunct="1">
+    <a:lvl9pPr marL="3657600" algn="l" defTabSz="914400" rtl="0" eaLnBrk="1" latinLnBrk="0" hangingPunct="1">
       <a:defRPr sz="1200" kern="1200">
         <a:solidFill>
           <a:schemeClr val="tx1"/>
@@ -1534,7 +1534,7 @@
             <a:pPr lvl="0"/>
             <a:r>
               <a:rPr lang="ko-KR" sz="1200"/>
-              <a:t>"05. 구조적 경계와 의존성"의 「37. 잘못된 관행 — 외부 모델 누수」를 모델 수준에서 본 것이다. 누수가 쌓이면 닮음이 된다.</a:t>
+              <a:t>"05. 구조적 경계와 의존성"의 「21. 잘못된 관행 — 외부 모델 누수」를 모델 수준에서 본 것이다. 누수가 쌓이면 닮음이 된다.</a:t>
             </a:r>
           </a:p>
         </p:txBody>
@@ -3286,7 +3286,7 @@
   <p:hf hdr="0" ftr="0" dt="0"/>
   <p:txStyles>
     <p:titleStyle>
-      <a:lvl1pPr algn="l" rtl="0" eaLnBrk="0" fontAlgn="base" latinLnBrk="1" hangingPunct="0">
+      <a:lvl1pPr algn="l" rtl="0" eaLnBrk="0" fontAlgn="base" latinLnBrk="0" hangingPunct="0">
         <a:spcBef>
           <a:spcPct val="0"/>
         </a:spcBef>
@@ -3302,7 +3302,7 @@
           <a:cs typeface="+mj-cs"/>
         </a:defRPr>
       </a:lvl1pPr>
-      <a:lvl2pPr algn="l" rtl="0" eaLnBrk="0" fontAlgn="base" latinLnBrk="1" hangingPunct="0">
+      <a:lvl2pPr algn="l" rtl="0" eaLnBrk="0" fontAlgn="base" latinLnBrk="0" hangingPunct="0">
         <a:spcBef>
           <a:spcPct val="0"/>
         </a:spcBef>
@@ -3317,7 +3317,7 @@
           <a:ea typeface="맑은 고딕" pitchFamily="50" charset="-127"/>
         </a:defRPr>
       </a:lvl2pPr>
-      <a:lvl3pPr algn="l" rtl="0" eaLnBrk="0" fontAlgn="base" latinLnBrk="1" hangingPunct="0">
+      <a:lvl3pPr algn="l" rtl="0" eaLnBrk="0" fontAlgn="base" latinLnBrk="0" hangingPunct="0">
         <a:spcBef>
           <a:spcPct val="0"/>
         </a:spcBef>
@@ -3332,7 +3332,7 @@
           <a:ea typeface="맑은 고딕" pitchFamily="50" charset="-127"/>
         </a:defRPr>
       </a:lvl3pPr>
-      <a:lvl4pPr algn="l" rtl="0" eaLnBrk="0" fontAlgn="base" latinLnBrk="1" hangingPunct="0">
+      <a:lvl4pPr algn="l" rtl="0" eaLnBrk="0" fontAlgn="base" latinLnBrk="0" hangingPunct="0">
         <a:spcBef>
           <a:spcPct val="0"/>
         </a:spcBef>
@@ -3347,7 +3347,7 @@
           <a:ea typeface="맑은 고딕" pitchFamily="50" charset="-127"/>
         </a:defRPr>
       </a:lvl4pPr>
-      <a:lvl5pPr algn="l" rtl="0" eaLnBrk="0" fontAlgn="base" latinLnBrk="1" hangingPunct="0">
+      <a:lvl5pPr algn="l" rtl="0" eaLnBrk="0" fontAlgn="base" latinLnBrk="0" hangingPunct="0">
         <a:spcBef>
           <a:spcPct val="0"/>
         </a:spcBef>
@@ -3362,7 +3362,7 @@
           <a:ea typeface="맑은 고딕" pitchFamily="50" charset="-127"/>
         </a:defRPr>
       </a:lvl5pPr>
-      <a:lvl6pPr marL="457200" algn="ctr" rtl="0" fontAlgn="base" latinLnBrk="1">
+      <a:lvl6pPr marL="457200" algn="ctr" rtl="0" fontAlgn="base" latinLnBrk="0">
         <a:spcBef>
           <a:spcPct val="0"/>
         </a:spcBef>
@@ -3377,7 +3377,7 @@
           <a:ea typeface="맑은 고딕" pitchFamily="50" charset="-127"/>
         </a:defRPr>
       </a:lvl6pPr>
-      <a:lvl7pPr marL="914400" algn="ctr" rtl="0" fontAlgn="base" latinLnBrk="1">
+      <a:lvl7pPr marL="914400" algn="ctr" rtl="0" fontAlgn="base" latinLnBrk="0">
         <a:spcBef>
           <a:spcPct val="0"/>
         </a:spcBef>
@@ -3392,7 +3392,7 @@
           <a:ea typeface="맑은 고딕" pitchFamily="50" charset="-127"/>
         </a:defRPr>
       </a:lvl7pPr>
-      <a:lvl8pPr marL="1371600" algn="ctr" rtl="0" fontAlgn="base" latinLnBrk="1">
+      <a:lvl8pPr marL="1371600" algn="ctr" rtl="0" fontAlgn="base" latinLnBrk="0">
         <a:spcBef>
           <a:spcPct val="0"/>
         </a:spcBef>
@@ -3407,7 +3407,7 @@
           <a:ea typeface="맑은 고딕" pitchFamily="50" charset="-127"/>
         </a:defRPr>
       </a:lvl8pPr>
-      <a:lvl9pPr marL="1828800" algn="ctr" rtl="0" fontAlgn="base" latinLnBrk="1">
+      <a:lvl9pPr marL="1828800" algn="ctr" rtl="0" fontAlgn="base" latinLnBrk="0">
         <a:spcBef>
           <a:spcPct val="0"/>
         </a:spcBef>
@@ -3424,7 +3424,7 @@
       </a:lvl9pPr>
     </p:titleStyle>
     <p:bodyStyle>
-      <a:lvl1pPr marL="342900" indent="-342900" algn="l" rtl="0" eaLnBrk="0" fontAlgn="base" latinLnBrk="1" hangingPunct="0">
+      <a:lvl1pPr marL="342900" indent="-342900" algn="l" rtl="0" eaLnBrk="0" fontAlgn="base" latinLnBrk="0" hangingPunct="0">
         <a:spcBef>
           <a:spcPct val="20000"/>
         </a:spcBef>
@@ -3442,7 +3442,7 @@
           <a:cs typeface="+mn-cs"/>
         </a:defRPr>
       </a:lvl1pPr>
-      <a:lvl2pPr marL="742950" indent="-285750" algn="l" rtl="0" eaLnBrk="0" fontAlgn="base" latinLnBrk="1" hangingPunct="0">
+      <a:lvl2pPr marL="742950" indent="-285750" algn="l" rtl="0" eaLnBrk="0" fontAlgn="base" latinLnBrk="0" hangingPunct="0">
         <a:spcBef>
           <a:spcPct val="20000"/>
         </a:spcBef>
@@ -3460,7 +3460,7 @@
           <a:cs typeface="+mn-cs"/>
         </a:defRPr>
       </a:lvl2pPr>
-      <a:lvl3pPr marL="1143000" indent="-228600" algn="l" rtl="0" eaLnBrk="0" fontAlgn="base" latinLnBrk="1" hangingPunct="0">
+      <a:lvl3pPr marL="1143000" indent="-228600" algn="l" rtl="0" eaLnBrk="0" fontAlgn="base" latinLnBrk="0" hangingPunct="0">
         <a:spcBef>
           <a:spcPct val="20000"/>
         </a:spcBef>
@@ -3478,7 +3478,7 @@
           <a:cs typeface="+mn-cs"/>
         </a:defRPr>
       </a:lvl3pPr>
-      <a:lvl4pPr marL="1600200" indent="-228600" algn="l" rtl="0" eaLnBrk="0" fontAlgn="base" latinLnBrk="1" hangingPunct="0">
+      <a:lvl4pPr marL="1600200" indent="-228600" algn="l" rtl="0" eaLnBrk="0" fontAlgn="base" latinLnBrk="0" hangingPunct="0">
         <a:spcBef>
           <a:spcPct val="20000"/>
         </a:spcBef>
@@ -3496,7 +3496,7 @@
           <a:cs typeface="+mn-cs"/>
         </a:defRPr>
       </a:lvl4pPr>
-      <a:lvl5pPr marL="2057400" indent="-228600" algn="l" rtl="0" eaLnBrk="0" fontAlgn="base" latinLnBrk="1" hangingPunct="0">
+      <a:lvl5pPr marL="2057400" indent="-228600" algn="l" rtl="0" eaLnBrk="0" fontAlgn="base" latinLnBrk="0" hangingPunct="0">
         <a:spcBef>
           <a:spcPct val="20000"/>
         </a:spcBef>
@@ -3514,7 +3514,7 @@
           <a:cs typeface="+mn-cs"/>
         </a:defRPr>
       </a:lvl5pPr>
-      <a:lvl6pPr marL="2514600" indent="-228600" algn="l" defTabSz="914400" rtl="0" eaLnBrk="1" latinLnBrk="1" hangingPunct="1">
+      <a:lvl6pPr marL="2514600" indent="-228600" algn="l" defTabSz="914400" rtl="0" eaLnBrk="1" latinLnBrk="0" hangingPunct="1">
         <a:spcBef>
           <a:spcPct val="20000"/>
         </a:spcBef>
@@ -3529,7 +3529,7 @@
           <a:cs typeface="+mn-cs"/>
         </a:defRPr>
       </a:lvl6pPr>
-      <a:lvl7pPr marL="2971800" indent="-228600" algn="l" defTabSz="914400" rtl="0" eaLnBrk="1" latinLnBrk="1" hangingPunct="1">
+      <a:lvl7pPr marL="2971800" indent="-228600" algn="l" defTabSz="914400" rtl="0" eaLnBrk="1" latinLnBrk="0" hangingPunct="1">
         <a:spcBef>
           <a:spcPct val="20000"/>
         </a:spcBef>
@@ -3544,7 +3544,7 @@
           <a:cs typeface="+mn-cs"/>
         </a:defRPr>
       </a:lvl7pPr>
-      <a:lvl8pPr marL="3429000" indent="-228600" algn="l" defTabSz="914400" rtl="0" eaLnBrk="1" latinLnBrk="1" hangingPunct="1">
+      <a:lvl8pPr marL="3429000" indent="-228600" algn="l" defTabSz="914400" rtl="0" eaLnBrk="1" latinLnBrk="0" hangingPunct="1">
         <a:spcBef>
           <a:spcPct val="20000"/>
         </a:spcBef>
@@ -3559,7 +3559,7 @@
           <a:cs typeface="+mn-cs"/>
         </a:defRPr>
       </a:lvl8pPr>
-      <a:lvl9pPr marL="3886200" indent="-228600" algn="l" defTabSz="914400" rtl="0" eaLnBrk="1" latinLnBrk="1" hangingPunct="1">
+      <a:lvl9pPr marL="3886200" indent="-228600" algn="l" defTabSz="914400" rtl="0" eaLnBrk="1" latinLnBrk="0" hangingPunct="1">
         <a:spcBef>
           <a:spcPct val="20000"/>
         </a:spcBef>
@@ -3579,7 +3579,7 @@
       <a:defPPr>
         <a:defRPr lang="ko-KR"/>
       </a:defPPr>
-      <a:lvl1pPr marL="0" algn="l" defTabSz="914400" rtl="0" eaLnBrk="1" latinLnBrk="1" hangingPunct="1">
+      <a:lvl1pPr marL="0" algn="l" defTabSz="914400" rtl="0" eaLnBrk="1" latinLnBrk="0" hangingPunct="1">
         <a:defRPr sz="1800" kern="1200">
           <a:solidFill>
             <a:schemeClr val="tx1"/>
@@ -3589,7 +3589,7 @@
           <a:cs typeface="+mn-cs"/>
         </a:defRPr>
       </a:lvl1pPr>
-      <a:lvl2pPr marL="457200" algn="l" defTabSz="914400" rtl="0" eaLnBrk="1" latinLnBrk="1" hangingPunct="1">
+      <a:lvl2pPr marL="457200" algn="l" defTabSz="914400" rtl="0" eaLnBrk="1" latinLnBrk="0" hangingPunct="1">
         <a:defRPr sz="1800" kern="1200">
           <a:solidFill>
             <a:schemeClr val="tx1"/>
@@ -3599,7 +3599,7 @@
           <a:cs typeface="+mn-cs"/>
         </a:defRPr>
       </a:lvl2pPr>
-      <a:lvl3pPr marL="914400" algn="l" defTabSz="914400" rtl="0" eaLnBrk="1" latinLnBrk="1" hangingPunct="1">
+      <a:lvl3pPr marL="914400" algn="l" defTabSz="914400" rtl="0" eaLnBrk="1" latinLnBrk="0" hangingPunct="1">
         <a:defRPr sz="1800" kern="1200">
           <a:solidFill>
             <a:schemeClr val="tx1"/>
@@ -3609,7 +3609,7 @@
           <a:cs typeface="+mn-cs"/>
         </a:defRPr>
       </a:lvl3pPr>
-      <a:lvl4pPr marL="1371600" algn="l" defTabSz="914400" rtl="0" eaLnBrk="1" latinLnBrk="1" hangingPunct="1">
+      <a:lvl4pPr marL="1371600" algn="l" defTabSz="914400" rtl="0" eaLnBrk="1" latinLnBrk="0" hangingPunct="1">
         <a:defRPr sz="1800" kern="1200">
           <a:solidFill>
             <a:schemeClr val="tx1"/>
@@ -3619,7 +3619,7 @@
           <a:cs typeface="+mn-cs"/>
         </a:defRPr>
       </a:lvl4pPr>
-      <a:lvl5pPr marL="1828800" algn="l" defTabSz="914400" rtl="0" eaLnBrk="1" latinLnBrk="1" hangingPunct="1">
+      <a:lvl5pPr marL="1828800" algn="l" defTabSz="914400" rtl="0" eaLnBrk="1" latinLnBrk="0" hangingPunct="1">
         <a:defRPr sz="1800" kern="1200">
           <a:solidFill>
             <a:schemeClr val="tx1"/>
@@ -3629,7 +3629,7 @@
           <a:cs typeface="+mn-cs"/>
         </a:defRPr>
       </a:lvl5pPr>
-      <a:lvl6pPr marL="2286000" algn="l" defTabSz="914400" rtl="0" eaLnBrk="1" latinLnBrk="1" hangingPunct="1">
+      <a:lvl6pPr marL="2286000" algn="l" defTabSz="914400" rtl="0" eaLnBrk="1" latinLnBrk="0" hangingPunct="1">
         <a:defRPr sz="1800" kern="1200">
           <a:solidFill>
             <a:schemeClr val="tx1"/>
@@ -3639,7 +3639,7 @@
           <a:cs typeface="+mn-cs"/>
         </a:defRPr>
       </a:lvl6pPr>
-      <a:lvl7pPr marL="2743200" algn="l" defTabSz="914400" rtl="0" eaLnBrk="1" latinLnBrk="1" hangingPunct="1">
+      <a:lvl7pPr marL="2743200" algn="l" defTabSz="914400" rtl="0" eaLnBrk="1" latinLnBrk="0" hangingPunct="1">
         <a:defRPr sz="1800" kern="1200">
           <a:solidFill>
             <a:schemeClr val="tx1"/>
@@ -3649,7 +3649,7 @@
           <a:cs typeface="+mn-cs"/>
         </a:defRPr>
       </a:lvl7pPr>
-      <a:lvl8pPr marL="3200400" algn="l" defTabSz="914400" rtl="0" eaLnBrk="1" latinLnBrk="1" hangingPunct="1">
+      <a:lvl8pPr marL="3200400" algn="l" defTabSz="914400" rtl="0" eaLnBrk="1" latinLnBrk="0" hangingPunct="1">
         <a:defRPr sz="1800" kern="1200">
           <a:solidFill>
             <a:schemeClr val="tx1"/>
@@ -3659,7 +3659,7 @@
           <a:cs typeface="+mn-cs"/>
         </a:defRPr>
       </a:lvl8pPr>
-      <a:lvl9pPr marL="3657600" algn="l" defTabSz="914400" rtl="0" eaLnBrk="1" latinLnBrk="1" hangingPunct="1">
+      <a:lvl9pPr marL="3657600" algn="l" defTabSz="914400" rtl="0" eaLnBrk="1" latinLnBrk="0" hangingPunct="1">
         <a:defRPr sz="1800" kern="1200">
           <a:solidFill>
             <a:schemeClr val="tx1"/>
@@ -7015,7 +7015,7 @@
                 <a:latin typeface="맑은 고딕"/>
                 <a:ea typeface="맑은 고딕"/>
               </a:rPr>
-              <a:t>Martin Fowler, 2002</a:t>
+              <a:t>[Fowler 2002]</a:t>
             </a:r>
           </a:p>
         </p:txBody>
@@ -11593,7 +11593,27 @@
                 <a:latin typeface="맑은 고딕"/>
                 <a:ea typeface="맑은 고딕"/>
               </a:rPr>
-              <a:t>한다. 기본값으로 바꾸지 않는다(「24. 잘못된 관행 —</a:t>
+              <a:t>한다. 기본값으로 바꾸지 않는다</a:t>
+            </a:r>
+            <a:r>
+              <a:rPr sz="1400" b="0">
+                <a:solidFill>
+                  <a:srgbClr val="000000"/>
+                </a:solidFill>
+                <a:latin typeface="맑은 고딕"/>
+                <a:ea typeface="맑은 고딕"/>
+              </a:rPr>
+              <a:t>(「24. 잘못된 관행 —</a:t>
+            </a:r>
+            <a:r>
+              <a:rPr sz="1200" b="0">
+                <a:solidFill>
+                  <a:srgbClr val="000000"/>
+                </a:solidFill>
+                <a:latin typeface="맑은 고딕"/>
+                <a:ea typeface="맑은 고딕"/>
+              </a:rPr>
+              <a:t> 조용한 기본값」)</a:t>
             </a:r>
             <a:r>
               <a:rPr sz="1600" b="0">
@@ -11603,7 +11623,7 @@
                 <a:latin typeface="맑은 고딕"/>
                 <a:ea typeface="맑은 고딕"/>
               </a:rPr>
-              <a:t> 조용한 기본값」).</a:t>
+              <a:t>.</a:t>
             </a:r>
           </a:p>
         </p:txBody>
@@ -14573,7 +14593,7 @@
                 <a:latin typeface="맑은 고딕"/>
                 <a:ea typeface="맑은 고딕"/>
               </a:rPr>
-              <a:t>Eric Evans, 2015</a:t>
+              <a:t>[Evans 2015]</a:t>
             </a:r>
           </a:p>
         </p:txBody>
@@ -19011,7 +19031,7 @@
                 <a:latin typeface="맑은 고딕"/>
                 <a:ea typeface="맑은 고딕"/>
               </a:rPr>
-              <a:t>Eric Evans, 2015</a:t>
+              <a:t>[Evans 2015]</a:t>
             </a:r>
           </a:p>
         </p:txBody>
@@ -19250,7 +19270,7 @@
           </p:nvPr>
         </p:nvGraphicFramePr>
         <p:xfrm>
-          <a:off x="1592136" y="2952933"/>
+          <a:off x="1592136" y="2801048"/>
           <a:ext cx="5946140" cy="3873500"/>
         </p:xfrm>
         <a:graphic>
@@ -19750,7 +19770,7 @@
         <p:spPr>
           <a:xfrm>
             <a:off x="365760" y="960120"/>
-            <a:ext cx="8412480" cy="1891213"/>
+            <a:ext cx="8412480" cy="1739328"/>
           </a:xfrm>
           <a:prstGeom prst="rect">
             <a:avLst/>
@@ -19883,7 +19903,7 @@
                 <a:latin typeface="맑은 고딕"/>
                 <a:ea typeface="맑은 고딕"/>
               </a:rPr>
-              <a:t>Eric Evans, 2015</a:t>
+              <a:t>[Evans 2015]</a:t>
             </a:r>
           </a:p>
         </p:txBody>
@@ -28029,6 +28049,27 @@
             </a:r>
           </a:p>
           <a:p>
+            <a:pPr marL="342900" indent="0">
+              <a:spcBef>
+                <a:spcPts val="600"/>
+              </a:spcBef>
+              <a:spcAft>
+                <a:spcPts val="600"/>
+              </a:spcAft>
+              <a:buNone/>
+            </a:pPr>
+            <a:r>
+              <a:rPr sz="1800" b="1">
+                <a:solidFill>
+                  <a:srgbClr val="000000"/>
+                </a:solidFill>
+                <a:latin typeface="맑은 고딕"/>
+                <a:ea typeface="맑은 고딕"/>
+              </a:rPr>
+              <a:t>기술 제약과 도메인 의미 보존의 핵심</a:t>
+            </a:r>
+          </a:p>
+          <a:p>
             <a:pPr lvl="2" marL="723900" indent="-368300">
               <a:spcBef>
                 <a:spcPts val="600"/>
@@ -28041,6 +28082,16 @@
               <a:buChar char=""/>
             </a:pPr>
             <a:r>
+              <a:rPr sz="1800" b="1">
+                <a:solidFill>
+                  <a:srgbClr val="000000"/>
+                </a:solidFill>
+                <a:latin typeface="맑은 고딕"/>
+                <a:ea typeface="맑은 고딕"/>
+              </a:rPr>
+              <a:t>원칙</a:t>
+            </a:r>
+            <a:r>
               <a:rPr sz="1800" b="0">
                 <a:solidFill>
                   <a:srgbClr val="000000"/>
@@ -28048,30 +28099,7 @@
                 <a:latin typeface="맑은 고딕"/>
                 <a:ea typeface="맑은 고딕"/>
               </a:rPr>
-              <a:t>기술 제약과 도메인 의미 보존의 핵심</a:t>
-            </a:r>
-          </a:p>
-          <a:p>
-            <a:pPr lvl="3" marL="1077913" indent="-354013">
-              <a:spcBef>
-                <a:spcPts val="600"/>
-              </a:spcBef>
-              <a:spcAft>
-                <a:spcPts val="600"/>
-              </a:spcAft>
-              <a:buSzPct val="90000"/>
-              <a:buFont typeface="Wingdings" pitchFamily="2" charset="2"/>
-              <a:buChar char=""/>
-            </a:pPr>
-            <a:r>
-              <a:rPr sz="1600" b="1">
-                <a:solidFill>
-                  <a:srgbClr val="000000"/>
-                </a:solidFill>
-                <a:latin typeface="맑은 고딕"/>
-                <a:ea typeface="맑은 고딕"/>
-              </a:rPr>
-              <a:t>원칙</a:t>
+              <a:t> —</a:t>
             </a:r>
             <a:r>
               <a:rPr sz="1600" b="0">
@@ -28081,342 +28109,7 @@
                 <a:latin typeface="맑은 고딕"/>
                 <a:ea typeface="맑은 고딕"/>
               </a:rPr>
-              <a:t> —</a:t>
-            </a:r>
-            <a:r>
-              <a:rPr sz="1400" b="0">
-                <a:solidFill>
-                  <a:srgbClr val="000000"/>
-                </a:solidFill>
-                <a:latin typeface="맑은 고딕"/>
-                <a:ea typeface="맑은 고딕"/>
-              </a:rPr>
               <a:t> 기술은 구조와 표현을 바꿀 수 있어도 의미를 조용히 바꾸지 않는다</a:t>
-            </a:r>
-          </a:p>
-          <a:p>
-            <a:pPr lvl="3" marL="1077913" indent="-354013">
-              <a:spcBef>
-                <a:spcPts val="600"/>
-              </a:spcBef>
-              <a:spcAft>
-                <a:spcPts val="600"/>
-              </a:spcAft>
-              <a:buSzPct val="90000"/>
-              <a:buFont typeface="Wingdings" pitchFamily="2" charset="2"/>
-              <a:buChar char=""/>
-            </a:pPr>
-            <a:r>
-              <a:rPr sz="1600" b="1">
-                <a:solidFill>
-                  <a:srgbClr val="000000"/>
-                </a:solidFill>
-                <a:latin typeface="맑은 고딕"/>
-                <a:ea typeface="맑은 고딕"/>
-              </a:rPr>
-              <a:t>압력</a:t>
-            </a:r>
-            <a:r>
-              <a:rPr sz="1600" b="0">
-                <a:solidFill>
-                  <a:srgbClr val="000000"/>
-                </a:solidFill>
-                <a:latin typeface="맑은 고딕"/>
-                <a:ea typeface="맑은 고딕"/>
-              </a:rPr>
-              <a:t> —</a:t>
-            </a:r>
-            <a:r>
-              <a:rPr sz="1400" b="0">
-                <a:solidFill>
-                  <a:srgbClr val="000000"/>
-                </a:solidFill>
-                <a:latin typeface="맑은 고딕"/>
-                <a:ea typeface="맑은 고딕"/>
-              </a:rPr>
-              <a:t> 영속성</a:t>
-            </a:r>
-            <a:r>
-              <a:rPr sz="1000" b="0">
-                <a:solidFill>
-                  <a:srgbClr val="000000"/>
-                </a:solidFill>
-                <a:latin typeface="맑은 고딕"/>
-                <a:ea typeface="맑은 고딕"/>
-              </a:rPr>
-              <a:t>(표현 불일치)</a:t>
-            </a:r>
-            <a:r>
-              <a:rPr sz="1400" b="0">
-                <a:solidFill>
-                  <a:srgbClr val="000000"/>
-                </a:solidFill>
-                <a:latin typeface="맑은 고딕"/>
-                <a:ea typeface="맑은 고딕"/>
-              </a:rPr>
-              <a:t>, 프레임워크</a:t>
-            </a:r>
-            <a:r>
-              <a:rPr sz="1000" b="0">
-                <a:solidFill>
-                  <a:srgbClr val="000000"/>
-                </a:solidFill>
-                <a:latin typeface="맑은 고딕"/>
-                <a:ea typeface="맑은 고딕"/>
-              </a:rPr>
-              <a:t>(컨트롤러)</a:t>
-            </a:r>
-            <a:r>
-              <a:rPr sz="1400" b="0">
-                <a:solidFill>
-                  <a:srgbClr val="000000"/>
-                </a:solidFill>
-                <a:latin typeface="맑은 고딕"/>
-                <a:ea typeface="맑은 고딕"/>
-              </a:rPr>
-              <a:t>, 외부 API</a:t>
-            </a:r>
-            <a:r>
-              <a:rPr sz="1000" b="0">
-                <a:solidFill>
-                  <a:srgbClr val="000000"/>
-                </a:solidFill>
-                <a:latin typeface="맑은 고딕"/>
-                <a:ea typeface="맑은 고딕"/>
-              </a:rPr>
-              <a:t>(외부 모델)</a:t>
-            </a:r>
-          </a:p>
-          <a:p>
-            <a:pPr lvl="3" marL="1077913" indent="-354013">
-              <a:spcBef>
-                <a:spcPts val="600"/>
-              </a:spcBef>
-              <a:spcAft>
-                <a:spcPts val="600"/>
-              </a:spcAft>
-              <a:buSzPct val="90000"/>
-              <a:buFont typeface="Wingdings" pitchFamily="2" charset="2"/>
-              <a:buChar char=""/>
-            </a:pPr>
-            <a:r>
-              <a:rPr sz="1600" b="1">
-                <a:solidFill>
-                  <a:srgbClr val="000000"/>
-                </a:solidFill>
-                <a:latin typeface="맑은 고딕"/>
-                <a:ea typeface="맑은 고딕"/>
-              </a:rPr>
-              <a:t>4개의 모델</a:t>
-            </a:r>
-            <a:r>
-              <a:rPr sz="1600" b="0">
-                <a:solidFill>
-                  <a:srgbClr val="000000"/>
-                </a:solidFill>
-                <a:latin typeface="맑은 고딕"/>
-                <a:ea typeface="맑은 고딕"/>
-              </a:rPr>
-              <a:t> —</a:t>
-            </a:r>
-            <a:r>
-              <a:rPr sz="1400" b="0">
-                <a:solidFill>
-                  <a:srgbClr val="000000"/>
-                </a:solidFill>
-                <a:latin typeface="맑은 고딕"/>
-                <a:ea typeface="맑은 고딕"/>
-              </a:rPr>
-              <a:t> 도메인(</a:t>
-            </a:r>
-            <a:r>
-              <a:rPr sz="1400" b="0">
-                <a:solidFill>
-                  <a:srgbClr val="000000"/>
-                </a:solidFill>
-                <a:latin typeface="맑은 고딕"/>
-                <a:ea typeface="맑은 고딕"/>
-              </a:rPr>
-              <a:t>order</a:t>
-            </a:r>
-            <a:r>
-              <a:rPr sz="1400" b="0">
-                <a:solidFill>
-                  <a:srgbClr val="000000"/>
-                </a:solidFill>
-                <a:latin typeface="맑은 고딕"/>
-                <a:ea typeface="맑은 고딕"/>
-              </a:rPr>
-              <a:t>), 어댑터</a:t>
-            </a:r>
-            <a:r>
-              <a:rPr sz="1000" b="0">
-                <a:solidFill>
-                  <a:srgbClr val="000000"/>
-                </a:solidFill>
-                <a:latin typeface="맑은 고딕"/>
-                <a:ea typeface="맑은 고딕"/>
-              </a:rPr>
-              <a:t>(연동)</a:t>
-            </a:r>
-            <a:r>
-              <a:rPr sz="1400" b="0">
-                <a:solidFill>
-                  <a:srgbClr val="000000"/>
-                </a:solidFill>
-                <a:latin typeface="맑은 고딕"/>
-                <a:ea typeface="맑은 고딕"/>
-              </a:rPr>
-              <a:t>, 인프라·물리 모델(</a:t>
-            </a:r>
-            <a:r>
-              <a:rPr sz="1400" b="0">
-                <a:solidFill>
-                  <a:srgbClr val="000000"/>
-                </a:solidFill>
-                <a:latin typeface="맑은 고딕"/>
-                <a:ea typeface="맑은 고딕"/>
-              </a:rPr>
-              <a:t>persistence</a:t>
-            </a:r>
-            <a:r>
-              <a:rPr sz="1400" b="0">
-                <a:solidFill>
-                  <a:srgbClr val="000000"/>
-                </a:solidFill>
-                <a:latin typeface="맑은 고딕"/>
-                <a:ea typeface="맑은 고딕"/>
-              </a:rPr>
-              <a:t>). 도메인은 기술을 모른다</a:t>
-            </a:r>
-          </a:p>
-          <a:p>
-            <a:pPr lvl="3" marL="1077913" indent="-354013">
-              <a:spcBef>
-                <a:spcPts val="600"/>
-              </a:spcBef>
-              <a:spcAft>
-                <a:spcPts val="600"/>
-              </a:spcAft>
-              <a:buSzPct val="90000"/>
-              <a:buFont typeface="Wingdings" pitchFamily="2" charset="2"/>
-              <a:buChar char=""/>
-            </a:pPr>
-            <a:r>
-              <a:rPr sz="1600" b="1">
-                <a:solidFill>
-                  <a:srgbClr val="000000"/>
-                </a:solidFill>
-                <a:latin typeface="맑은 고딕"/>
-                <a:ea typeface="맑은 고딕"/>
-              </a:rPr>
-              <a:t>매핑</a:t>
-            </a:r>
-            <a:r>
-              <a:rPr sz="1600" b="0">
-                <a:solidFill>
-                  <a:srgbClr val="000000"/>
-                </a:solidFill>
-                <a:latin typeface="맑은 고딕"/>
-                <a:ea typeface="맑은 고딕"/>
-              </a:rPr>
-              <a:t> —</a:t>
-            </a:r>
-            <a:r>
-              <a:rPr sz="1400" b="0">
-                <a:solidFill>
-                  <a:srgbClr val="000000"/>
-                </a:solidFill>
-                <a:latin typeface="맑은 고딕"/>
-                <a:ea typeface="맑은 고딕"/>
-              </a:rPr>
-              <a:t> 상태는 이름, 확정 값은 그대로, 파생 값은 저장하지 않는다, 복원은 규칙을 다시 검사</a:t>
-            </a:r>
-          </a:p>
-          <a:p>
-            <a:pPr lvl="3" marL="1077913" indent="-354013">
-              <a:spcBef>
-                <a:spcPts val="600"/>
-              </a:spcBef>
-              <a:spcAft>
-                <a:spcPts val="600"/>
-              </a:spcAft>
-              <a:buSzPct val="90000"/>
-              <a:buFont typeface="Wingdings" pitchFamily="2" charset="2"/>
-              <a:buChar char=""/>
-            </a:pPr>
-            <a:r>
-              <a:rPr sz="1600" b="1">
-                <a:solidFill>
-                  <a:srgbClr val="000000"/>
-                </a:solidFill>
-                <a:latin typeface="맑은 고딕"/>
-                <a:ea typeface="맑은 고딕"/>
-              </a:rPr>
-              <a:t>검증</a:t>
-            </a:r>
-            <a:r>
-              <a:rPr sz="1600" b="0">
-                <a:solidFill>
-                  <a:srgbClr val="000000"/>
-                </a:solidFill>
-                <a:latin typeface="맑은 고딕"/>
-                <a:ea typeface="맑은 고딕"/>
-              </a:rPr>
-              <a:t> —</a:t>
-            </a:r>
-            <a:r>
-              <a:rPr sz="1400" b="0">
-                <a:solidFill>
-                  <a:srgbClr val="000000"/>
-                </a:solidFill>
-                <a:latin typeface="맑은 고딕"/>
-                <a:ea typeface="맑은 고딕"/>
-              </a:rPr>
-              <a:t> 라운드트립 테스트로 저장·복원·변환의 의미를 확인한다</a:t>
-            </a:r>
-          </a:p>
-          <a:p>
-            <a:pPr lvl="3" marL="1077913" indent="-354013">
-              <a:spcBef>
-                <a:spcPts val="600"/>
-              </a:spcBef>
-              <a:spcAft>
-                <a:spcPts val="600"/>
-              </a:spcAft>
-              <a:buSzPct val="90000"/>
-              <a:buFont typeface="Wingdings" pitchFamily="2" charset="2"/>
-              <a:buChar char=""/>
-            </a:pPr>
-            <a:r>
-              <a:rPr sz="1600" b="1">
-                <a:solidFill>
-                  <a:srgbClr val="000000"/>
-                </a:solidFill>
-                <a:latin typeface="맑은 고딕"/>
-                <a:ea typeface="맑은 고딕"/>
-              </a:rPr>
-              <a:t>잘못된 관행</a:t>
-            </a:r>
-            <a:r>
-              <a:rPr sz="1600" b="0">
-                <a:solidFill>
-                  <a:srgbClr val="000000"/>
-                </a:solidFill>
-                <a:latin typeface="맑은 고딕"/>
-                <a:ea typeface="맑은 고딕"/>
-              </a:rPr>
-              <a:t> —</a:t>
-            </a:r>
-            <a:r>
-              <a:rPr sz="1400" b="0">
-                <a:solidFill>
-                  <a:srgbClr val="000000"/>
-                </a:solidFill>
-                <a:latin typeface="맑은 고딕"/>
-                <a:ea typeface="맑은 고딕"/>
-              </a:rPr>
-              <a:t> 테이블이 모델, 외부 모델 닮기, 프레임워크 규칙, 조용한 기본값</a:t>
             </a:r>
           </a:p>
           <a:p>
@@ -28432,6 +28125,16 @@
               <a:buChar char=""/>
             </a:pPr>
             <a:r>
+              <a:rPr sz="1800" b="1">
+                <a:solidFill>
+                  <a:srgbClr val="000000"/>
+                </a:solidFill>
+                <a:latin typeface="맑은 고딕"/>
+                <a:ea typeface="맑은 고딕"/>
+              </a:rPr>
+              <a:t>압력</a:t>
+            </a:r>
+            <a:r>
               <a:rPr sz="1800" b="0">
                 <a:solidFill>
                   <a:srgbClr val="000000"/>
@@ -28439,11 +28142,71 @@
                 <a:latin typeface="맑은 고딕"/>
                 <a:ea typeface="맑은 고딕"/>
               </a:rPr>
-              <a:t>다음 세션</a:t>
-            </a:r>
-          </a:p>
-          <a:p>
-            <a:pPr lvl="3" marL="1077913" indent="-354013">
+              <a:t> —</a:t>
+            </a:r>
+            <a:r>
+              <a:rPr sz="1600" b="0">
+                <a:solidFill>
+                  <a:srgbClr val="000000"/>
+                </a:solidFill>
+                <a:latin typeface="맑은 고딕"/>
+                <a:ea typeface="맑은 고딕"/>
+              </a:rPr>
+              <a:t> 영속성</a:t>
+            </a:r>
+            <a:r>
+              <a:rPr sz="1200" b="0">
+                <a:solidFill>
+                  <a:srgbClr val="000000"/>
+                </a:solidFill>
+                <a:latin typeface="맑은 고딕"/>
+                <a:ea typeface="맑은 고딕"/>
+              </a:rPr>
+              <a:t>(표현 불일치)</a:t>
+            </a:r>
+            <a:r>
+              <a:rPr sz="1600" b="0">
+                <a:solidFill>
+                  <a:srgbClr val="000000"/>
+                </a:solidFill>
+                <a:latin typeface="맑은 고딕"/>
+                <a:ea typeface="맑은 고딕"/>
+              </a:rPr>
+              <a:t>, 프레임워크</a:t>
+            </a:r>
+            <a:r>
+              <a:rPr sz="1200" b="0">
+                <a:solidFill>
+                  <a:srgbClr val="000000"/>
+                </a:solidFill>
+                <a:latin typeface="맑은 고딕"/>
+                <a:ea typeface="맑은 고딕"/>
+              </a:rPr>
+              <a:t>(컨트롤러)</a:t>
+            </a:r>
+            <a:r>
+              <a:rPr sz="1600" b="0">
+                <a:solidFill>
+                  <a:srgbClr val="000000"/>
+                </a:solidFill>
+                <a:latin typeface="맑은 고딕"/>
+                <a:ea typeface="맑은 고딕"/>
+              </a:rPr>
+              <a:t>, 외부 API</a:t>
+            </a:r>
+            <a:r>
+              <a:rPr sz="1200" b="0">
+                <a:solidFill>
+                  <a:srgbClr val="000000"/>
+                </a:solidFill>
+                <a:latin typeface="맑은 고딕"/>
+                <a:ea typeface="맑은 고딕"/>
+              </a:rPr>
+              <a:t>(외부 모델)</a:t>
+            </a:r>
+          </a:p>
+          <a:p>
+            <a:pPr lvl="2" marL="723900" indent="-368300">
               <a:spcBef>
                 <a:spcPts val="600"/>
               </a:spcBef>
@@ -28452,9 +28215,29 @@
               </a:spcAft>
               <a:buSzPct val="90000"/>
               <a:buFont typeface="Wingdings" pitchFamily="2" charset="2"/>
-              <a:buChar char=""/>
+              <a:buChar char=""/>
             </a:pPr>
             <a:r>
+              <a:rPr sz="1800" b="1">
+                <a:solidFill>
+                  <a:srgbClr val="000000"/>
+                </a:solidFill>
+                <a:latin typeface="맑은 고딕"/>
+                <a:ea typeface="맑은 고딕"/>
+              </a:rPr>
+              <a:t>4개의 모델</a:t>
+            </a:r>
+            <a:r>
+              <a:rPr sz="1800" b="0">
+                <a:solidFill>
+                  <a:srgbClr val="000000"/>
+                </a:solidFill>
+                <a:latin typeface="맑은 고딕"/>
+                <a:ea typeface="맑은 고딕"/>
+              </a:rPr>
+              <a:t> —</a:t>
+            </a:r>
+            <a:r>
               <a:rPr sz="1600" b="0">
                 <a:solidFill>
                   <a:srgbClr val="000000"/>
@@ -28462,10 +28245,243 @@
                 <a:latin typeface="맑은 고딕"/>
                 <a:ea typeface="맑은 고딕"/>
               </a:rPr>
+              <a:t> 도메인(</a:t>
+            </a:r>
+            <a:r>
+              <a:rPr sz="1600" b="0">
+                <a:solidFill>
+                  <a:srgbClr val="000000"/>
+                </a:solidFill>
+                <a:latin typeface="맑은 고딕"/>
+                <a:ea typeface="맑은 고딕"/>
+              </a:rPr>
+              <a:t>order</a:t>
+            </a:r>
+            <a:r>
+              <a:rPr sz="1600" b="0">
+                <a:solidFill>
+                  <a:srgbClr val="000000"/>
+                </a:solidFill>
+                <a:latin typeface="맑은 고딕"/>
+                <a:ea typeface="맑은 고딕"/>
+              </a:rPr>
+              <a:t>), 어댑터</a:t>
+            </a:r>
+            <a:r>
+              <a:rPr sz="1200" b="0">
+                <a:solidFill>
+                  <a:srgbClr val="000000"/>
+                </a:solidFill>
+                <a:latin typeface="맑은 고딕"/>
+                <a:ea typeface="맑은 고딕"/>
+              </a:rPr>
+              <a:t>(연동)</a:t>
+            </a:r>
+            <a:r>
+              <a:rPr sz="1600" b="0">
+                <a:solidFill>
+                  <a:srgbClr val="000000"/>
+                </a:solidFill>
+                <a:latin typeface="맑은 고딕"/>
+                <a:ea typeface="맑은 고딕"/>
+              </a:rPr>
+              <a:t>, 인프라·물리 모델(</a:t>
+            </a:r>
+            <a:r>
+              <a:rPr sz="1600" b="0">
+                <a:solidFill>
+                  <a:srgbClr val="000000"/>
+                </a:solidFill>
+                <a:latin typeface="맑은 고딕"/>
+                <a:ea typeface="맑은 고딕"/>
+              </a:rPr>
+              <a:t>persistence</a:t>
+            </a:r>
+            <a:r>
+              <a:rPr sz="1600" b="0">
+                <a:solidFill>
+                  <a:srgbClr val="000000"/>
+                </a:solidFill>
+                <a:latin typeface="맑은 고딕"/>
+                <a:ea typeface="맑은 고딕"/>
+              </a:rPr>
+              <a:t>). 도메인은 기술을 모른다</a:t>
+            </a:r>
+          </a:p>
+          <a:p>
+            <a:pPr lvl="2" marL="723900" indent="-368300">
+              <a:spcBef>
+                <a:spcPts val="600"/>
+              </a:spcBef>
+              <a:spcAft>
+                <a:spcPts val="600"/>
+              </a:spcAft>
+              <a:buSzPct val="90000"/>
+              <a:buFont typeface="Wingdings" pitchFamily="2" charset="2"/>
+              <a:buChar char=""/>
+            </a:pPr>
+            <a:r>
+              <a:rPr sz="1800" b="1">
+                <a:solidFill>
+                  <a:srgbClr val="000000"/>
+                </a:solidFill>
+                <a:latin typeface="맑은 고딕"/>
+                <a:ea typeface="맑은 고딕"/>
+              </a:rPr>
+              <a:t>매핑</a:t>
+            </a:r>
+            <a:r>
+              <a:rPr sz="1800" b="0">
+                <a:solidFill>
+                  <a:srgbClr val="000000"/>
+                </a:solidFill>
+                <a:latin typeface="맑은 고딕"/>
+                <a:ea typeface="맑은 고딕"/>
+              </a:rPr>
+              <a:t> —</a:t>
+            </a:r>
+            <a:r>
+              <a:rPr sz="1600" b="0">
+                <a:solidFill>
+                  <a:srgbClr val="000000"/>
+                </a:solidFill>
+                <a:latin typeface="맑은 고딕"/>
+                <a:ea typeface="맑은 고딕"/>
+              </a:rPr>
+              <a:t> 상태는 이름, 확정 값은 그대로, 파생 값은 저장하지 않는다, 복원은 규칙을 다시 검사</a:t>
+            </a:r>
+          </a:p>
+          <a:p>
+            <a:pPr lvl="2" marL="723900" indent="-368300">
+              <a:spcBef>
+                <a:spcPts val="600"/>
+              </a:spcBef>
+              <a:spcAft>
+                <a:spcPts val="600"/>
+              </a:spcAft>
+              <a:buSzPct val="90000"/>
+              <a:buFont typeface="Wingdings" pitchFamily="2" charset="2"/>
+              <a:buChar char=""/>
+            </a:pPr>
+            <a:r>
+              <a:rPr sz="1800" b="1">
+                <a:solidFill>
+                  <a:srgbClr val="000000"/>
+                </a:solidFill>
+                <a:latin typeface="맑은 고딕"/>
+                <a:ea typeface="맑은 고딕"/>
+              </a:rPr>
+              <a:t>검증</a:t>
+            </a:r>
+            <a:r>
+              <a:rPr sz="1800" b="0">
+                <a:solidFill>
+                  <a:srgbClr val="000000"/>
+                </a:solidFill>
+                <a:latin typeface="맑은 고딕"/>
+                <a:ea typeface="맑은 고딕"/>
+              </a:rPr>
+              <a:t> —</a:t>
+            </a:r>
+            <a:r>
+              <a:rPr sz="1600" b="0">
+                <a:solidFill>
+                  <a:srgbClr val="000000"/>
+                </a:solidFill>
+                <a:latin typeface="맑은 고딕"/>
+                <a:ea typeface="맑은 고딕"/>
+              </a:rPr>
+              <a:t> 라운드트립 테스트로 저장·복원·변환의 의미를 확인한다</a:t>
+            </a:r>
+          </a:p>
+          <a:p>
+            <a:pPr lvl="2" marL="723900" indent="-368300">
+              <a:spcBef>
+                <a:spcPts val="600"/>
+              </a:spcBef>
+              <a:spcAft>
+                <a:spcPts val="600"/>
+              </a:spcAft>
+              <a:buSzPct val="90000"/>
+              <a:buFont typeface="Wingdings" pitchFamily="2" charset="2"/>
+              <a:buChar char=""/>
+            </a:pPr>
+            <a:r>
+              <a:rPr sz="1800" b="1">
+                <a:solidFill>
+                  <a:srgbClr val="000000"/>
+                </a:solidFill>
+                <a:latin typeface="맑은 고딕"/>
+                <a:ea typeface="맑은 고딕"/>
+              </a:rPr>
+              <a:t>잘못된 관행</a:t>
+            </a:r>
+            <a:r>
+              <a:rPr sz="1800" b="0">
+                <a:solidFill>
+                  <a:srgbClr val="000000"/>
+                </a:solidFill>
+                <a:latin typeface="맑은 고딕"/>
+                <a:ea typeface="맑은 고딕"/>
+              </a:rPr>
+              <a:t> —</a:t>
+            </a:r>
+            <a:r>
+              <a:rPr sz="1600" b="0">
+                <a:solidFill>
+                  <a:srgbClr val="000000"/>
+                </a:solidFill>
+                <a:latin typeface="맑은 고딕"/>
+                <a:ea typeface="맑은 고딕"/>
+              </a:rPr>
+              <a:t> 테이블이 모델, 외부 모델 닮기, 프레임워크 규칙, 조용한 기본값</a:t>
+            </a:r>
+          </a:p>
+          <a:p>
+            <a:pPr marL="342900" indent="0">
+              <a:spcBef>
+                <a:spcPts val="600"/>
+              </a:spcBef>
+              <a:spcAft>
+                <a:spcPts val="600"/>
+              </a:spcAft>
+              <a:buNone/>
+            </a:pPr>
+            <a:r>
+              <a:rPr sz="1800" b="1">
+                <a:solidFill>
+                  <a:srgbClr val="000000"/>
+                </a:solidFill>
+                <a:latin typeface="맑은 고딕"/>
+                <a:ea typeface="맑은 고딕"/>
+              </a:rPr>
+              <a:t>다음 세션</a:t>
+            </a:r>
+          </a:p>
+          <a:p>
+            <a:pPr lvl="2" marL="723900" indent="-368300">
+              <a:spcBef>
+                <a:spcPts val="600"/>
+              </a:spcBef>
+              <a:spcAft>
+                <a:spcPts val="600"/>
+              </a:spcAft>
+              <a:buSzPct val="90000"/>
+              <a:buFont typeface="Wingdings" pitchFamily="2" charset="2"/>
+              <a:buChar char=""/>
+            </a:pPr>
+            <a:r>
+              <a:rPr sz="1800" b="0">
+                <a:solidFill>
+                  <a:srgbClr val="000000"/>
+                </a:solidFill>
+                <a:latin typeface="맑은 고딕"/>
+                <a:ea typeface="맑은 고딕"/>
+              </a:rPr>
               <a:t>"</a:t>
             </a:r>
             <a:r>
-              <a:rPr sz="1600" b="1">
+              <a:rPr sz="1800" b="1">
                 <a:solidFill>
                   <a:srgbClr val="000000"/>
                 </a:solidFill>
@@ -28475,17 +28491,17 @@
               <a:t>11. 통합 설계와 적정 모델링</a:t>
             </a:r>
             <a:r>
+              <a:rPr sz="1800" b="0">
+                <a:solidFill>
+                  <a:srgbClr val="000000"/>
+                </a:solidFill>
+                <a:latin typeface="맑은 고딕"/>
+                <a:ea typeface="맑은 고딕"/>
+              </a:rPr>
+              <a:t>" —</a:t>
+            </a:r>
+            <a:r>
               <a:rPr sz="1600" b="0">
-                <a:solidFill>
-                  <a:srgbClr val="000000"/>
-                </a:solidFill>
-                <a:latin typeface="맑은 고딕"/>
-                <a:ea typeface="맑은 고딕"/>
-              </a:rPr>
-              <a:t>" —</a:t>
-            </a:r>
-            <a:r>
-              <a:rPr sz="1400" b="0">
                 <a:solidFill>
                   <a:srgbClr val="000000"/>
                 </a:solidFill>
@@ -28843,7 +28859,7 @@
                 <a:latin typeface="맑은 고딕"/>
                 <a:ea typeface="맑은 고딕"/>
               </a:rPr>
-              <a:t>Eric Evans, 2015</a:t>
+              <a:t>[Evans 2015]</a:t>
             </a:r>
           </a:p>
           <a:p>
@@ -30374,7 +30390,7 @@
                 <a:latin typeface="맑은 고딕"/>
                 <a:ea typeface="맑은 고딕"/>
               </a:rPr>
-              <a:t>Craig Larman, 2004</a:t>
+              <a:t>[Larman 2004]</a:t>
             </a:r>
           </a:p>
         </p:txBody>
@@ -31525,7 +31541,7 @@
                 <a:latin typeface="맑은 고딕"/>
                 <a:ea typeface="맑은 고딕"/>
               </a:rPr>
-              <a:t>Craig Larman, 2004</a:t>
+              <a:t>[Larman 2004]</a:t>
             </a:r>
           </a:p>
         </p:txBody>
@@ -33428,7 +33444,7 @@
                 <a:latin typeface="맑은 고딕"/>
                 <a:ea typeface="맑은 고딕"/>
               </a:rPr>
-              <a:t>Eric Evans, 2015</a:t>
+              <a:t>[Evans 2015]</a:t>
             </a:r>
           </a:p>
           <a:p>
@@ -33511,7 +33527,7 @@
                 <a:latin typeface="맑은 고딕"/>
                 <a:ea typeface="맑은 고딕"/>
               </a:rPr>
-              <a:t>DeliverySystem</a:t>
+              <a:t>DeliveryGateway</a:t>
             </a:r>
             <a:r>
               <a:rPr sz="1600" b="0">

--- a/courses/ooad/sessions/s10.pptx
+++ b/courses/ooad/sessions/s10.pptx
@@ -908,7 +908,7 @@
             <a:pPr lvl="0"/>
             <a:r>
               <a:rPr lang="ko-KR" sz="1200"/>
-              <a:t>단가와 판매가의 구분은 "02. 요구 분석과 유스케이스"의 용어집에서 정의하고 "03. 정적 모델 — 도메인 개념과 관계"의 「35. 현재 값과 확정 값」에서 모델로 확인했다. 저장은 그 의미를 지키는 마지막 자리다.</a:t>
+              <a:t>단가와 판매가의 구분은 "02. 요구 분석과 유스케이스"의 용어집에서 정의하고 "03. 정적 모델 — 도메인 개념과 관계"의 「11. 개념의 분리」의 「현재 값과 확정 값」에서 모델로 확인했다. 저장은 그 의미를 지키는 마지막 자리다.</a:t>
             </a:r>
           </a:p>
           <a:p>
@@ -4108,6 +4108,48 @@
               <a:t>15. 복원과 불변 조건</a:t>
             </a:r>
           </a:p>
+          <a:p>
+            <a:pPr lvl="1" marL="355600" indent="0">
+              <a:spcBef>
+                <a:spcPts val="300"/>
+              </a:spcBef>
+              <a:spcAft>
+                <a:spcPts val="300"/>
+              </a:spcAft>
+              <a:buNone/>
+            </a:pPr>
+            <a:r>
+              <a:rPr sz="1600" b="0">
+                <a:solidFill>
+                  <a:srgbClr val="000000"/>
+                </a:solidFill>
+                <a:latin typeface="맑은 고딕"/>
+                <a:ea typeface="맑은 고딕"/>
+              </a:rPr>
+              <a:t>16. 외부 형식의 변환</a:t>
+            </a:r>
+          </a:p>
+          <a:p>
+            <a:pPr lvl="1" marL="355600" indent="0">
+              <a:spcBef>
+                <a:spcPts val="300"/>
+              </a:spcBef>
+              <a:spcAft>
+                <a:spcPts val="300"/>
+              </a:spcAft>
+              <a:buNone/>
+            </a:pPr>
+            <a:r>
+              <a:rPr sz="1600" b="0">
+                <a:solidFill>
+                  <a:srgbClr val="000000"/>
+                </a:solidFill>
+                <a:latin typeface="맑은 고딕"/>
+                <a:ea typeface="맑은 고딕"/>
+              </a:rPr>
+              <a:t>17. 변환의 손실</a:t>
+            </a:r>
+          </a:p>
         </p:txBody>
       </p:sp>
       <p:sp>
@@ -4212,48 +4254,6 @@
             <a:normAutofit/>
           </a:bodyPr>
           <a:lstStyle/>
-          <a:p>
-            <a:pPr lvl="1" marL="355600" indent="0">
-              <a:spcBef>
-                <a:spcPts val="300"/>
-              </a:spcBef>
-              <a:spcAft>
-                <a:spcPts val="300"/>
-              </a:spcAft>
-              <a:buNone/>
-            </a:pPr>
-            <a:r>
-              <a:rPr sz="1600" b="0">
-                <a:solidFill>
-                  <a:srgbClr val="000000"/>
-                </a:solidFill>
-                <a:latin typeface="맑은 고딕"/>
-                <a:ea typeface="맑은 고딕"/>
-              </a:rPr>
-              <a:t>16. 외부 형식의 변환</a:t>
-            </a:r>
-          </a:p>
-          <a:p>
-            <a:pPr lvl="1" marL="355600" indent="0">
-              <a:spcBef>
-                <a:spcPts val="300"/>
-              </a:spcBef>
-              <a:spcAft>
-                <a:spcPts val="300"/>
-              </a:spcAft>
-              <a:buNone/>
-            </a:pPr>
-            <a:r>
-              <a:rPr sz="1600" b="0">
-                <a:solidFill>
-                  <a:srgbClr val="000000"/>
-                </a:solidFill>
-                <a:latin typeface="맑은 고딕"/>
-                <a:ea typeface="맑은 고딕"/>
-              </a:rPr>
-              <a:t>17. 변환의 손실</a:t>
-            </a:r>
-          </a:p>
           <a:p>
             <a:pPr lvl="1" marL="355600" indent="0">
               <a:spcBef>
@@ -22965,7 +22965,7 @@
         <p:spPr>
           <a:xfrm>
             <a:off x="365760" y="960120"/>
-            <a:ext cx="8622792" cy="5522976"/>
+            <a:ext cx="8622792" cy="5352345"/>
           </a:xfrm>
         </p:spPr>
         <p:txBody>
@@ -25491,7 +25491,7 @@
         <p:spPr>
           <a:xfrm>
             <a:off x="233172" y="1414318"/>
-            <a:ext cx="4338828" cy="5068778"/>
+            <a:ext cx="4338828" cy="4898147"/>
           </a:xfrm>
         </p:spPr>
         <p:txBody>
@@ -25848,7 +25848,7 @@
         <p:spPr>
           <a:xfrm>
             <a:off x="4572000" y="1414318"/>
-            <a:ext cx="4439412" cy="5068778"/>
+            <a:ext cx="4439412" cy="4898147"/>
           </a:xfrm>
         </p:spPr>
         <p:txBody>
@@ -27226,7 +27226,7 @@
         <p:spPr>
           <a:xfrm>
             <a:off x="233172" y="1414318"/>
-            <a:ext cx="4338828" cy="5068778"/>
+            <a:ext cx="4338828" cy="4898147"/>
           </a:xfrm>
         </p:spPr>
         <p:txBody>
@@ -27607,7 +27607,7 @@
         <p:spPr>
           <a:xfrm>
             <a:off x="4572000" y="1414318"/>
-            <a:ext cx="4439412" cy="5068778"/>
+            <a:ext cx="4439412" cy="4898147"/>
           </a:xfrm>
         </p:spPr>
         <p:txBody>

--- a/courses/ooad/sessions/s10.pptx
+++ b/courses/ooad/sessions/s10.pptx
@@ -1534,7 +1534,7 @@
             <a:pPr lvl="0"/>
             <a:r>
               <a:rPr lang="ko-KR" sz="1200"/>
-              <a:t>"05. 구조적 경계와 의존성"의 「21. 잘못된 관행 — 외부 모델 누수」를 모델 수준에서 본 것이다. 누수가 쌓이면 닮음이 된다.</a:t>
+              <a:t>"05. 구조적 경계와 의존성"의 「18. 잘못된 관행」의 「외부 모델 누수」를 모델 수준에서 본 것이다. 누수가 쌓이면 닮음이 된다.</a:t>
             </a:r>
           </a:p>
         </p:txBody>
@@ -1867,14 +1867,7 @@
             <a:pPr lvl="0"/>
             <a:r>
               <a:rPr lang="ko-KR" sz="1200"/>
-              <a:t>회차 목록은 파생 값이 아니다 — 회차마다 상태가 바뀌므로 저장한다. 회차의 예정일은 첫 배송일과 주기로 계산할 수 있지만, 배송지 변경 등으로 바뀔 수 있어 저장한다.</a:t>
-            </a:r>
-          </a:p>
-          <a:p>
-            <a:pPr lvl="0"/>
-            <a:r>
-              <a:rPr lang="ko-KR" sz="1200"/>
-              <a:t>결제·영수증 테이블은 생략했다.</a:t>
+              <a:t>다음 세션은 요구 분석부터 이 세션까지의 산출물을 하나의 흐름으로 잇고, 어디까지 모델링할지를 판단한다.</a:t>
             </a:r>
           </a:p>
         </p:txBody>
@@ -1935,14 +1928,14 @@
             <a:pPr lvl="0"/>
             <a:r>
               <a:rPr lang="ko-KR" sz="1200"/>
-              <a:t>배송 주기의 손실은 다형성의 저장에서 흔하다 — 종류가 사라지면 같은 숫자가 다른 뜻이 된다.</a:t>
+              <a:t>회차 목록은 파생 값이 아니다 — 회차마다 상태가 바뀌므로 저장한다. 회차의 예정일은 첫 배송일과 주기로 계산할 수 있지만, 배송지 변경 등으로 바뀔 수 있어 저장한다.</a:t>
             </a:r>
           </a:p>
           <a:p>
             <a:pPr lvl="0"/>
             <a:r>
               <a:rPr lang="ko-KR" sz="1200"/>
-              <a:t>수강생의 점검표가 달라도 위험마다 확인하는 테스트가 있으면 맞다.</a:t>
+              <a:t>결제·영수증 테이블은 생략했다.</a:t>
             </a:r>
           </a:p>
         </p:txBody>
@@ -2071,7 +2064,14 @@
             <a:pPr lvl="0"/>
             <a:r>
               <a:rPr lang="ko-KR" sz="1200"/>
-              <a:t>저장 형식의 결정도 결정 기록으로 남긴다. 나중에 JSON 칼럼이나 별도 테이블로 바꿀 때 근거가 된다.</a:t>
+              <a:t>배송 주기의 손실은 다형성의 저장에서 흔하다 — 종류가 사라지면 같은 숫자가 다른 뜻이 된다.</a:t>
+            </a:r>
+          </a:p>
+          <a:p>
+            <a:pPr lvl="0"/>
+            <a:r>
+              <a:rPr lang="ko-KR" sz="1200"/>
+              <a:t>수강생의 점검표가 달라도 위험마다 확인하는 테스트가 있으면 맞다.</a:t>
             </a:r>
           </a:p>
         </p:txBody>
@@ -2132,7 +2132,7 @@
             <a:pPr lvl="0"/>
             <a:r>
               <a:rPr lang="ko-KR" sz="1200"/>
-              <a:t>다음 세션은 요구 분석부터 이 세션까지의 산출물을 하나의 흐름으로 잇고, 어디까지 모델링할지를 판단한다.</a:t>
+              <a:t>저장 형식의 결정도 결정 기록으로 남긴다. 나중에 JSON 칼럼이나 별도 테이블로 바꿀 때 근거가 된다.</a:t>
             </a:r>
           </a:p>
         </p:txBody>
@@ -4511,100 +4511,7 @@
                 <a:latin typeface="맑은 고딕"/>
                 <a:ea typeface="맑은 고딕"/>
               </a:rPr>
-              <a:t>27. 매핑 표 </a:t>
-            </a:r>
-            <a:r>
-              <a:rPr sz="1200" b="0">
-                <a:solidFill>
-                  <a:srgbClr val="000000"/>
-                </a:solidFill>
-                <a:latin typeface="맑은 고딕"/>
-                <a:ea typeface="맑은 고딕"/>
-              </a:rPr>
-              <a:t>(안)</a:t>
-            </a:r>
-          </a:p>
-          <a:p>
-            <a:pPr lvl="1" marL="355600" indent="0">
-              <a:spcBef>
-                <a:spcPts val="300"/>
-              </a:spcBef>
-              <a:spcAft>
-                <a:spcPts val="300"/>
-              </a:spcAft>
-              <a:buNone/>
-            </a:pPr>
-            <a:r>
-              <a:rPr sz="1600" b="0">
-                <a:solidFill>
-                  <a:srgbClr val="000000"/>
-                </a:solidFill>
-                <a:latin typeface="맑은 고딕"/>
-                <a:ea typeface="맑은 고딕"/>
-              </a:rPr>
-              <a:t>28. 의미 손실 점검 </a:t>
-            </a:r>
-            <a:r>
-              <a:rPr sz="1200" b="0">
-                <a:solidFill>
-                  <a:srgbClr val="000000"/>
-                </a:solidFill>
-                <a:latin typeface="맑은 고딕"/>
-                <a:ea typeface="맑은 고딕"/>
-              </a:rPr>
-              <a:t>(안)</a:t>
-            </a:r>
-          </a:p>
-          <a:p>
-            <a:pPr lvl="1" marL="355600" indent="0">
-              <a:spcBef>
-                <a:spcPts val="300"/>
-              </a:spcBef>
-              <a:spcAft>
-                <a:spcPts val="300"/>
-              </a:spcAft>
-              <a:buNone/>
-            </a:pPr>
-            <a:r>
-              <a:rPr sz="1600" b="0">
-                <a:solidFill>
-                  <a:srgbClr val="000000"/>
-                </a:solidFill>
-                <a:latin typeface="맑은 고딕"/>
-                <a:ea typeface="맑은 고딕"/>
-              </a:rPr>
-              <a:t>29. 기술 제약 보완 </a:t>
-            </a:r>
-            <a:r>
-              <a:rPr sz="1200" b="0">
-                <a:solidFill>
-                  <a:srgbClr val="000000"/>
-                </a:solidFill>
-                <a:latin typeface="맑은 고딕"/>
-                <a:ea typeface="맑은 고딕"/>
-              </a:rPr>
-              <a:t>(안)</a:t>
-            </a:r>
-          </a:p>
-          <a:p>
-            <a:pPr lvl="1" marL="355600" indent="0">
-              <a:spcBef>
-                <a:spcPts val="300"/>
-              </a:spcBef>
-              <a:spcAft>
-                <a:spcPts val="300"/>
-              </a:spcAft>
-              <a:buNone/>
-            </a:pPr>
-            <a:r>
-              <a:rPr sz="1600" b="0">
-                <a:solidFill>
-                  <a:srgbClr val="000000"/>
-                </a:solidFill>
-                <a:latin typeface="맑은 고딕"/>
-                <a:ea typeface="맑은 고딕"/>
-              </a:rPr>
-              <a:t>30. 요약</a:t>
+              <a:t>27. 요약</a:t>
             </a:r>
           </a:p>
         </p:txBody>
@@ -11890,7 +11797,7 @@
                           <a:ea typeface="맑은 고딕" panose="020B0503020000020004" pitchFamily="34" charset="-127"/>
                           <a:cs typeface="맑은 고딕"/>
                         </a:rPr>
-                        <a:t>언제의 값인가</a:t>
+                        <a:t>언제의 값인가?</a:t>
                       </a:r>
                     </a:p>
                   </a:txBody>
@@ -23182,7 +23089,7 @@
               <a:t>매핑 표</a:t>
             </a:r>
             <a:r>
-              <a:rPr sz="1000" b="0">
+              <a:rPr sz="1200" b="0">
                 <a:solidFill>
                   <a:srgbClr val="000000"/>
                 </a:solidFill>
@@ -23327,7 +23234,7 @@
               <a:t> —</a:t>
             </a:r>
             <a:r>
-              <a:rPr sz="1050" b="0">
+              <a:rPr sz="1400" b="0">
                 <a:solidFill>
                   <a:srgbClr val="000000"/>
                 </a:solidFill>
@@ -23378,7 +23285,7 @@
               <a:t> —</a:t>
             </a:r>
             <a:r>
-              <a:rPr sz="1050" b="0">
+              <a:rPr sz="1400" b="0">
                 <a:solidFill>
                   <a:srgbClr val="000000"/>
                 </a:solidFill>
@@ -23429,7 +23336,7 @@
               <a:t> —</a:t>
             </a:r>
             <a:r>
-              <a:rPr sz="1050" b="0">
+              <a:rPr sz="1400" b="0">
                 <a:solidFill>
                   <a:srgbClr val="000000"/>
                 </a:solidFill>
@@ -23480,7 +23387,7 @@
               <a:t> —</a:t>
             </a:r>
             <a:r>
-              <a:rPr sz="1050" b="0">
+              <a:rPr sz="1400" b="0">
                 <a:solidFill>
                   <a:srgbClr val="000000"/>
                 </a:solidFill>
@@ -23531,7 +23438,7 @@
               <a:t> —</a:t>
             </a:r>
             <a:r>
-              <a:rPr sz="1050" b="0">
+              <a:rPr sz="1400" b="0">
                 <a:solidFill>
                   <a:srgbClr val="000000"/>
                 </a:solidFill>
@@ -23541,7 +23448,7 @@
               <a:t> 복원이 생성 규칙</a:t>
             </a:r>
             <a:r>
-              <a:rPr sz="850" b="0">
+              <a:rPr sz="1200" b="0">
                 <a:solidFill>
                   <a:srgbClr val="000000"/>
                 </a:solidFill>
@@ -23551,7 +23458,7 @@
               <a:t>(주기 1~28, 기간 1~12)</a:t>
             </a:r>
             <a:r>
-              <a:rPr sz="1050" b="0">
+              <a:rPr sz="1400" b="0">
                 <a:solidFill>
                   <a:srgbClr val="000000"/>
                 </a:solidFill>
@@ -23602,7 +23509,7 @@
               <a:t> —</a:t>
             </a:r>
             <a:r>
-              <a:rPr sz="1050" b="0">
+              <a:rPr sz="1400" b="0">
                 <a:solidFill>
                   <a:srgbClr val="000000"/>
                 </a:solidFill>
@@ -23645,7 +23552,7 @@
               <a:t> —</a:t>
             </a:r>
             <a:r>
-              <a:rPr sz="1050" b="0">
+              <a:rPr sz="1600" b="0">
                 <a:solidFill>
                   <a:srgbClr val="000000"/>
                 </a:solidFill>
@@ -23671,6 +23578,717 @@
 </file>
 
 <file path=ppt/slides/slide28.xml><?xml version="1.0" encoding="utf-8"?>
+<p:sld xmlns:a="http://schemas.openxmlformats.org/drawingml/2006/main" xmlns:r="http://schemas.openxmlformats.org/officeDocument/2006/relationships" xmlns:p="http://schemas.openxmlformats.org/presentationml/2006/main">
+  <p:cSld>
+    <p:spTree>
+      <p:nvGrpSpPr>
+        <p:cNvPr id="1" name="">
+          <a:extLst>
+            <a:ext uri="{FF2B5EF4-FFF2-40B4-BE49-F238E27FC236}">
+              <a16:creationId xmlns:a16="http://schemas.microsoft.com/office/drawing/2014/main" id="{8E4F1F13-426B-086B-7D8C-9A58A0F879DB}"/>
+            </a:ext>
+          </a:extLst>
+        </p:cNvPr>
+        <p:cNvGrpSpPr/>
+        <p:nvPr/>
+      </p:nvGrpSpPr>
+      <p:grpSpPr>
+        <a:xfrm>
+          <a:off x="0" y="0"/>
+          <a:ext cx="0" cy="0"/>
+          <a:chOff x="0" y="0"/>
+          <a:chExt cx="0" cy="0"/>
+        </a:xfrm>
+      </p:grpSpPr>
+      <p:sp>
+        <p:nvSpPr>
+          <p:cNvPr id="2" name="제목 1">
+            <a:extLst>
+              <a:ext uri="{FF2B5EF4-FFF2-40B4-BE49-F238E27FC236}">
+                <a16:creationId xmlns:a16="http://schemas.microsoft.com/office/drawing/2014/main" id="{AA26A92D-924E-0575-9551-F8FD7BFD3FAD}"/>
+              </a:ext>
+            </a:extLst>
+          </p:cNvPr>
+          <p:cNvSpPr>
+            <a:spLocks noGrp="1"/>
+          </p:cNvSpPr>
+          <p:nvPr>
+            <p:ph type="title"/>
+          </p:nvPr>
+        </p:nvSpPr>
+        <p:spPr/>
+        <p:txBody>
+          <a:bodyPr/>
+          <a:lstStyle/>
+          <a:p>
+            <a:r>
+              <a:rPr sz="2400" b="1">
+                <a:solidFill>
+                  <a:srgbClr val="000000"/>
+                </a:solidFill>
+                <a:latin typeface="맑은 고딕"/>
+                <a:ea typeface="맑은 고딕"/>
+              </a:rPr>
+              <a:t>27. 요약</a:t>
+            </a:r>
+          </a:p>
+        </p:txBody>
+      </p:sp>
+      <p:sp>
+        <p:nvSpPr>
+          <p:cNvPr id="3" name="슬라이드 번호 개체 틀 2">
+            <a:extLst>
+              <a:ext uri="{FF2B5EF4-FFF2-40B4-BE49-F238E27FC236}">
+                <a16:creationId xmlns:a16="http://schemas.microsoft.com/office/drawing/2014/main" id="{12CF30EE-4DFD-8063-56B8-B8689E76DFCA}"/>
+              </a:ext>
+            </a:extLst>
+          </p:cNvPr>
+          <p:cNvSpPr>
+            <a:spLocks noGrp="1"/>
+          </p:cNvSpPr>
+          <p:nvPr>
+            <p:ph type="sldNum" sz="quarter" idx="10"/>
+          </p:nvPr>
+        </p:nvSpPr>
+        <p:spPr/>
+        <p:txBody>
+          <a:bodyPr/>
+          <a:lstStyle/>
+          <a:p>
+            <a:pPr>
+              <a:defRPr/>
+            </a:pPr>
+            <a:r>
+              <a:rPr lang="en-US" altLang="ko-KR">
+                <a:solidFill>
+                  <a:prstClr val="black"/>
+                </a:solidFill>
+              </a:rPr>
+              <a:t>- 28 -</a:t>
+            </a:r>
+          </a:p>
+        </p:txBody>
+      </p:sp>
+      <p:sp>
+        <p:nvSpPr>
+          <p:cNvPr id="5" name="텍스트 개체 틀 4">
+            <a:extLst>
+              <a:ext uri="{FF2B5EF4-FFF2-40B4-BE49-F238E27FC236}">
+                <a16:creationId xmlns:a16="http://schemas.microsoft.com/office/drawing/2014/main" id="{D66274C8-E16F-5AEB-614B-D8D32DA3E8C6}"/>
+              </a:ext>
+            </a:extLst>
+          </p:cNvPr>
+          <p:cNvSpPr>
+            <a:spLocks noGrp="1"/>
+          </p:cNvSpPr>
+          <p:nvPr>
+            <p:ph type="body" sz="quarter" idx="11"/>
+          </p:nvPr>
+        </p:nvSpPr>
+        <p:spPr/>
+        <p:txBody>
+          <a:bodyPr/>
+          <a:lstStyle/>
+          <a:p>
+            <a:r>
+              <a:rPr kumimoji="1" lang="en-US" altLang="ko-KR" sz="1400" dirty="0" err="1"/>
+              <a:t>10. 기술 제약과 도메인 의미 보존</a:t>
+            </a:r>
+          </a:p>
+        </p:txBody>
+      </p:sp>
+      <p:sp>
+        <p:nvSpPr>
+          <p:cNvPr id="6" name="텍스트 개체 틀 5">
+            <a:extLst>
+              <a:ext uri="{FF2B5EF4-FFF2-40B4-BE49-F238E27FC236}">
+                <a16:creationId xmlns:a16="http://schemas.microsoft.com/office/drawing/2014/main" id="{A24E58E1-194B-A320-AEEE-24D08685BB67}"/>
+              </a:ext>
+            </a:extLst>
+          </p:cNvPr>
+          <p:cNvSpPr>
+            <a:spLocks noGrp="1"/>
+          </p:cNvSpPr>
+          <p:nvPr>
+            <p:ph type="body" sz="quarter" idx="12"/>
+          </p:nvPr>
+        </p:nvSpPr>
+        <p:spPr/>
+        <p:txBody>
+          <a:bodyPr/>
+          <a:lstStyle/>
+          <a:p>
+            <a:endParaRPr kumimoji="1" lang="ko-KR" altLang="en-US" dirty="0"/>
+          </a:p>
+        </p:txBody>
+      </p:sp>
+      <p:sp>
+        <p:nvSpPr>
+          <p:cNvPr id="7" name="텍스트 개체 틀 6">
+            <a:extLst>
+              <a:ext uri="{FF2B5EF4-FFF2-40B4-BE49-F238E27FC236}">
+                <a16:creationId xmlns:a16="http://schemas.microsoft.com/office/drawing/2014/main" id="{A219F420-613B-6234-45F6-0955A9A4505F}"/>
+              </a:ext>
+            </a:extLst>
+          </p:cNvPr>
+          <p:cNvSpPr>
+            <a:spLocks noGrp="1"/>
+          </p:cNvSpPr>
+          <p:nvPr>
+            <p:ph type="body" sz="quarter" idx="13"/>
+          </p:nvPr>
+        </p:nvSpPr>
+        <p:spPr/>
+        <p:txBody>
+          <a:bodyPr/>
+          <a:lstStyle/>
+          <a:p>
+            <a:endParaRPr kumimoji="1" lang="en-US" altLang="ko-KR" dirty="0"/>
+          </a:p>
+        </p:txBody>
+      </p:sp>
+      <p:sp>
+        <p:nvSpPr>
+          <p:cNvPr id="8" name="내용 개체 틀 7">
+            <a:extLst>
+              <a:ext uri="{FF2B5EF4-FFF2-40B4-BE49-F238E27FC236}">
+                <a16:creationId xmlns:a16="http://schemas.microsoft.com/office/drawing/2014/main" id="{BEBA2C4A-B0BF-F2E4-EA6E-614C99CBA184}"/>
+              </a:ext>
+            </a:extLst>
+          </p:cNvPr>
+          <p:cNvSpPr>
+            <a:spLocks noGrp="1"/>
+          </p:cNvSpPr>
+          <p:nvPr>
+            <p:ph idx="1"/>
+          </p:nvPr>
+        </p:nvSpPr>
+        <p:spPr/>
+        <p:txBody>
+          <a:bodyPr>
+            <a:normAutofit/>
+          </a:bodyPr>
+          <a:lstStyle/>
+          <a:p>
+            <a:pPr marL="0" indent="0">
+              <a:spcBef>
+                <a:spcPts val="600"/>
+              </a:spcBef>
+              <a:spcAft>
+                <a:spcPts val="600"/>
+              </a:spcAft>
+              <a:buNone/>
+            </a:pPr>
+            <a:r>
+              <a:rPr sz="1800" b="0">
+                <a:solidFill>
+                  <a:srgbClr val="000000"/>
+                </a:solidFill>
+                <a:latin typeface="맑은 고딕"/>
+                <a:ea typeface="맑은 고딕"/>
+              </a:rPr>
+              <a:t>이 세션은 기술 제약에 적응하면서 도메인 </a:t>
+            </a:r>
+            <a:r>
+              <a:rPr sz="1800" b="1">
+                <a:solidFill>
+                  <a:srgbClr val="000000"/>
+                </a:solidFill>
+                <a:latin typeface="맑은 고딕"/>
+                <a:ea typeface="맑은 고딕"/>
+              </a:rPr>
+              <a:t>의미를 보존</a:t>
+            </a:r>
+            <a:r>
+              <a:rPr sz="1800" b="0">
+                <a:solidFill>
+                  <a:srgbClr val="000000"/>
+                </a:solidFill>
+                <a:latin typeface="맑은 고딕"/>
+                <a:ea typeface="맑은 고딕"/>
+              </a:rPr>
+              <a:t>하는 구조와 검증을 다뤘다.</a:t>
+            </a:r>
+          </a:p>
+          <a:p>
+            <a:pPr marL="342900" indent="0">
+              <a:spcBef>
+                <a:spcPts val="600"/>
+              </a:spcBef>
+              <a:spcAft>
+                <a:spcPts val="600"/>
+              </a:spcAft>
+              <a:buNone/>
+            </a:pPr>
+            <a:r>
+              <a:rPr sz="1800" b="1">
+                <a:solidFill>
+                  <a:srgbClr val="000000"/>
+                </a:solidFill>
+                <a:latin typeface="맑은 고딕"/>
+                <a:ea typeface="맑은 고딕"/>
+              </a:rPr>
+              <a:t>기술 제약과 도메인 의미 보존의 핵심</a:t>
+            </a:r>
+          </a:p>
+          <a:p>
+            <a:pPr lvl="2" marL="723900" indent="-368300">
+              <a:spcBef>
+                <a:spcPts val="600"/>
+              </a:spcBef>
+              <a:spcAft>
+                <a:spcPts val="600"/>
+              </a:spcAft>
+              <a:buSzPct val="90000"/>
+              <a:buFont typeface="Wingdings" pitchFamily="2" charset="2"/>
+              <a:buChar char=""/>
+            </a:pPr>
+            <a:r>
+              <a:rPr sz="1800" b="1">
+                <a:solidFill>
+                  <a:srgbClr val="000000"/>
+                </a:solidFill>
+                <a:latin typeface="맑은 고딕"/>
+                <a:ea typeface="맑은 고딕"/>
+              </a:rPr>
+              <a:t>원칙</a:t>
+            </a:r>
+            <a:r>
+              <a:rPr sz="1800" b="0">
+                <a:solidFill>
+                  <a:srgbClr val="000000"/>
+                </a:solidFill>
+                <a:latin typeface="맑은 고딕"/>
+                <a:ea typeface="맑은 고딕"/>
+              </a:rPr>
+              <a:t> —</a:t>
+            </a:r>
+            <a:r>
+              <a:rPr sz="1600" b="0">
+                <a:solidFill>
+                  <a:srgbClr val="000000"/>
+                </a:solidFill>
+                <a:latin typeface="맑은 고딕"/>
+                <a:ea typeface="맑은 고딕"/>
+              </a:rPr>
+              <a:t> 기술은 구조와 표현을 바꿀 수 있어도 의미를 조용히 바꾸지 않는다</a:t>
+            </a:r>
+          </a:p>
+          <a:p>
+            <a:pPr lvl="2" marL="723900" indent="-368300">
+              <a:spcBef>
+                <a:spcPts val="600"/>
+              </a:spcBef>
+              <a:spcAft>
+                <a:spcPts val="600"/>
+              </a:spcAft>
+              <a:buSzPct val="90000"/>
+              <a:buFont typeface="Wingdings" pitchFamily="2" charset="2"/>
+              <a:buChar char=""/>
+            </a:pPr>
+            <a:r>
+              <a:rPr sz="1800" b="1">
+                <a:solidFill>
+                  <a:srgbClr val="000000"/>
+                </a:solidFill>
+                <a:latin typeface="맑은 고딕"/>
+                <a:ea typeface="맑은 고딕"/>
+              </a:rPr>
+              <a:t>압력</a:t>
+            </a:r>
+            <a:r>
+              <a:rPr sz="1800" b="0">
+                <a:solidFill>
+                  <a:srgbClr val="000000"/>
+                </a:solidFill>
+                <a:latin typeface="맑은 고딕"/>
+                <a:ea typeface="맑은 고딕"/>
+              </a:rPr>
+              <a:t> —</a:t>
+            </a:r>
+            <a:r>
+              <a:rPr sz="1600" b="0">
+                <a:solidFill>
+                  <a:srgbClr val="000000"/>
+                </a:solidFill>
+                <a:latin typeface="맑은 고딕"/>
+                <a:ea typeface="맑은 고딕"/>
+              </a:rPr>
+              <a:t> 영속성</a:t>
+            </a:r>
+            <a:r>
+              <a:rPr sz="1200" b="0">
+                <a:solidFill>
+                  <a:srgbClr val="000000"/>
+                </a:solidFill>
+                <a:latin typeface="맑은 고딕"/>
+                <a:ea typeface="맑은 고딕"/>
+              </a:rPr>
+              <a:t>(표현 불일치)</a:t>
+            </a:r>
+            <a:r>
+              <a:rPr sz="1600" b="0">
+                <a:solidFill>
+                  <a:srgbClr val="000000"/>
+                </a:solidFill>
+                <a:latin typeface="맑은 고딕"/>
+                <a:ea typeface="맑은 고딕"/>
+              </a:rPr>
+              <a:t>, 프레임워크</a:t>
+            </a:r>
+            <a:r>
+              <a:rPr sz="1200" b="0">
+                <a:solidFill>
+                  <a:srgbClr val="000000"/>
+                </a:solidFill>
+                <a:latin typeface="맑은 고딕"/>
+                <a:ea typeface="맑은 고딕"/>
+              </a:rPr>
+              <a:t>(컨트롤러)</a:t>
+            </a:r>
+            <a:r>
+              <a:rPr sz="1600" b="0">
+                <a:solidFill>
+                  <a:srgbClr val="000000"/>
+                </a:solidFill>
+                <a:latin typeface="맑은 고딕"/>
+                <a:ea typeface="맑은 고딕"/>
+              </a:rPr>
+              <a:t>, 외부 API</a:t>
+            </a:r>
+            <a:r>
+              <a:rPr sz="1200" b="0">
+                <a:solidFill>
+                  <a:srgbClr val="000000"/>
+                </a:solidFill>
+                <a:latin typeface="맑은 고딕"/>
+                <a:ea typeface="맑은 고딕"/>
+              </a:rPr>
+              <a:t>(외부 모델)</a:t>
+            </a:r>
+          </a:p>
+          <a:p>
+            <a:pPr lvl="2" marL="723900" indent="-368300">
+              <a:spcBef>
+                <a:spcPts val="600"/>
+              </a:spcBef>
+              <a:spcAft>
+                <a:spcPts val="600"/>
+              </a:spcAft>
+              <a:buSzPct val="90000"/>
+              <a:buFont typeface="Wingdings" pitchFamily="2" charset="2"/>
+              <a:buChar char=""/>
+            </a:pPr>
+            <a:r>
+              <a:rPr sz="1800" b="1">
+                <a:solidFill>
+                  <a:srgbClr val="000000"/>
+                </a:solidFill>
+                <a:latin typeface="맑은 고딕"/>
+                <a:ea typeface="맑은 고딕"/>
+              </a:rPr>
+              <a:t>4개의 모델</a:t>
+            </a:r>
+            <a:r>
+              <a:rPr sz="1800" b="0">
+                <a:solidFill>
+                  <a:srgbClr val="000000"/>
+                </a:solidFill>
+                <a:latin typeface="맑은 고딕"/>
+                <a:ea typeface="맑은 고딕"/>
+              </a:rPr>
+              <a:t> —</a:t>
+            </a:r>
+            <a:r>
+              <a:rPr sz="1600" b="0">
+                <a:solidFill>
+                  <a:srgbClr val="000000"/>
+                </a:solidFill>
+                <a:latin typeface="맑은 고딕"/>
+                <a:ea typeface="맑은 고딕"/>
+              </a:rPr>
+              <a:t> 도메인(</a:t>
+            </a:r>
+            <a:r>
+              <a:rPr sz="1600" b="0">
+                <a:solidFill>
+                  <a:srgbClr val="000000"/>
+                </a:solidFill>
+                <a:latin typeface="맑은 고딕"/>
+                <a:ea typeface="맑은 고딕"/>
+              </a:rPr>
+              <a:t>order</a:t>
+            </a:r>
+            <a:r>
+              <a:rPr sz="1600" b="0">
+                <a:solidFill>
+                  <a:srgbClr val="000000"/>
+                </a:solidFill>
+                <a:latin typeface="맑은 고딕"/>
+                <a:ea typeface="맑은 고딕"/>
+              </a:rPr>
+              <a:t>), 어댑터</a:t>
+            </a:r>
+            <a:r>
+              <a:rPr sz="1200" b="0">
+                <a:solidFill>
+                  <a:srgbClr val="000000"/>
+                </a:solidFill>
+                <a:latin typeface="맑은 고딕"/>
+                <a:ea typeface="맑은 고딕"/>
+              </a:rPr>
+              <a:t>(연동)</a:t>
+            </a:r>
+            <a:r>
+              <a:rPr sz="1600" b="0">
+                <a:solidFill>
+                  <a:srgbClr val="000000"/>
+                </a:solidFill>
+                <a:latin typeface="맑은 고딕"/>
+                <a:ea typeface="맑은 고딕"/>
+              </a:rPr>
+              <a:t>, 인프라·물리 모델(</a:t>
+            </a:r>
+            <a:r>
+              <a:rPr sz="1600" b="0">
+                <a:solidFill>
+                  <a:srgbClr val="000000"/>
+                </a:solidFill>
+                <a:latin typeface="맑은 고딕"/>
+                <a:ea typeface="맑은 고딕"/>
+              </a:rPr>
+              <a:t>persistence</a:t>
+            </a:r>
+            <a:r>
+              <a:rPr sz="1600" b="0">
+                <a:solidFill>
+                  <a:srgbClr val="000000"/>
+                </a:solidFill>
+                <a:latin typeface="맑은 고딕"/>
+                <a:ea typeface="맑은 고딕"/>
+              </a:rPr>
+              <a:t>). 도메인은 기술을 모른다</a:t>
+            </a:r>
+          </a:p>
+          <a:p>
+            <a:pPr lvl="2" marL="723900" indent="-368300">
+              <a:spcBef>
+                <a:spcPts val="600"/>
+              </a:spcBef>
+              <a:spcAft>
+                <a:spcPts val="600"/>
+              </a:spcAft>
+              <a:buSzPct val="90000"/>
+              <a:buFont typeface="Wingdings" pitchFamily="2" charset="2"/>
+              <a:buChar char=""/>
+            </a:pPr>
+            <a:r>
+              <a:rPr sz="1800" b="1">
+                <a:solidFill>
+                  <a:srgbClr val="000000"/>
+                </a:solidFill>
+                <a:latin typeface="맑은 고딕"/>
+                <a:ea typeface="맑은 고딕"/>
+              </a:rPr>
+              <a:t>매핑</a:t>
+            </a:r>
+            <a:r>
+              <a:rPr sz="1800" b="0">
+                <a:solidFill>
+                  <a:srgbClr val="000000"/>
+                </a:solidFill>
+                <a:latin typeface="맑은 고딕"/>
+                <a:ea typeface="맑은 고딕"/>
+              </a:rPr>
+              <a:t> —</a:t>
+            </a:r>
+            <a:r>
+              <a:rPr sz="1600" b="0">
+                <a:solidFill>
+                  <a:srgbClr val="000000"/>
+                </a:solidFill>
+                <a:latin typeface="맑은 고딕"/>
+                <a:ea typeface="맑은 고딕"/>
+              </a:rPr>
+              <a:t> 상태는 이름, 확정 값은 그대로, 파생 값은 저장하지 않는다, 복원은 규칙을 다시 검사</a:t>
+            </a:r>
+          </a:p>
+          <a:p>
+            <a:pPr lvl="2" marL="723900" indent="-368300">
+              <a:spcBef>
+                <a:spcPts val="600"/>
+              </a:spcBef>
+              <a:spcAft>
+                <a:spcPts val="600"/>
+              </a:spcAft>
+              <a:buSzPct val="90000"/>
+              <a:buFont typeface="Wingdings" pitchFamily="2" charset="2"/>
+              <a:buChar char=""/>
+            </a:pPr>
+            <a:r>
+              <a:rPr sz="1800" b="1">
+                <a:solidFill>
+                  <a:srgbClr val="000000"/>
+                </a:solidFill>
+                <a:latin typeface="맑은 고딕"/>
+                <a:ea typeface="맑은 고딕"/>
+              </a:rPr>
+              <a:t>검증</a:t>
+            </a:r>
+            <a:r>
+              <a:rPr sz="1800" b="0">
+                <a:solidFill>
+                  <a:srgbClr val="000000"/>
+                </a:solidFill>
+                <a:latin typeface="맑은 고딕"/>
+                <a:ea typeface="맑은 고딕"/>
+              </a:rPr>
+              <a:t> —</a:t>
+            </a:r>
+            <a:r>
+              <a:rPr sz="1600" b="0">
+                <a:solidFill>
+                  <a:srgbClr val="000000"/>
+                </a:solidFill>
+                <a:latin typeface="맑은 고딕"/>
+                <a:ea typeface="맑은 고딕"/>
+              </a:rPr>
+              <a:t> 라운드트립 테스트로 저장·복원·변환의 의미를 확인한다</a:t>
+            </a:r>
+          </a:p>
+          <a:p>
+            <a:pPr lvl="2" marL="723900" indent="-368300">
+              <a:spcBef>
+                <a:spcPts val="600"/>
+              </a:spcBef>
+              <a:spcAft>
+                <a:spcPts val="600"/>
+              </a:spcAft>
+              <a:buSzPct val="90000"/>
+              <a:buFont typeface="Wingdings" pitchFamily="2" charset="2"/>
+              <a:buChar char=""/>
+            </a:pPr>
+            <a:r>
+              <a:rPr sz="1800" b="1">
+                <a:solidFill>
+                  <a:srgbClr val="000000"/>
+                </a:solidFill>
+                <a:latin typeface="맑은 고딕"/>
+                <a:ea typeface="맑은 고딕"/>
+              </a:rPr>
+              <a:t>잘못된 관행</a:t>
+            </a:r>
+            <a:r>
+              <a:rPr sz="1800" b="0">
+                <a:solidFill>
+                  <a:srgbClr val="000000"/>
+                </a:solidFill>
+                <a:latin typeface="맑은 고딕"/>
+                <a:ea typeface="맑은 고딕"/>
+              </a:rPr>
+              <a:t> —</a:t>
+            </a:r>
+            <a:r>
+              <a:rPr sz="1600" b="0">
+                <a:solidFill>
+                  <a:srgbClr val="000000"/>
+                </a:solidFill>
+                <a:latin typeface="맑은 고딕"/>
+                <a:ea typeface="맑은 고딕"/>
+              </a:rPr>
+              <a:t> 테이블이 모델, 외부 모델 닮기, 프레임워크 규칙, 조용한 기본값</a:t>
+            </a:r>
+          </a:p>
+          <a:p>
+            <a:pPr marL="342900" indent="0">
+              <a:spcBef>
+                <a:spcPts val="600"/>
+              </a:spcBef>
+              <a:spcAft>
+                <a:spcPts val="600"/>
+              </a:spcAft>
+              <a:buNone/>
+            </a:pPr>
+            <a:r>
+              <a:rPr sz="1800" b="1">
+                <a:solidFill>
+                  <a:srgbClr val="000000"/>
+                </a:solidFill>
+                <a:latin typeface="맑은 고딕"/>
+                <a:ea typeface="맑은 고딕"/>
+              </a:rPr>
+              <a:t>다음 세션</a:t>
+            </a:r>
+          </a:p>
+          <a:p>
+            <a:pPr lvl="2" marL="723900" indent="-368300">
+              <a:spcBef>
+                <a:spcPts val="600"/>
+              </a:spcBef>
+              <a:spcAft>
+                <a:spcPts val="600"/>
+              </a:spcAft>
+              <a:buSzPct val="90000"/>
+              <a:buFont typeface="Wingdings" pitchFamily="2" charset="2"/>
+              <a:buChar char=""/>
+            </a:pPr>
+            <a:r>
+              <a:rPr sz="1800" b="0">
+                <a:solidFill>
+                  <a:srgbClr val="000000"/>
+                </a:solidFill>
+                <a:latin typeface="맑은 고딕"/>
+                <a:ea typeface="맑은 고딕"/>
+              </a:rPr>
+              <a:t>"</a:t>
+            </a:r>
+            <a:r>
+              <a:rPr sz="1800" b="1">
+                <a:solidFill>
+                  <a:srgbClr val="000000"/>
+                </a:solidFill>
+                <a:latin typeface="맑은 고딕"/>
+                <a:ea typeface="맑은 고딕"/>
+              </a:rPr>
+              <a:t>11. 통합 설계와 적정 모델링</a:t>
+            </a:r>
+            <a:r>
+              <a:rPr sz="1800" b="0">
+                <a:solidFill>
+                  <a:srgbClr val="000000"/>
+                </a:solidFill>
+                <a:latin typeface="맑은 고딕"/>
+                <a:ea typeface="맑은 고딕"/>
+              </a:rPr>
+              <a:t>" —</a:t>
+            </a:r>
+            <a:r>
+              <a:rPr sz="1600" b="0">
+                <a:solidFill>
+                  <a:srgbClr val="000000"/>
+                </a:solidFill>
+                <a:latin typeface="맑은 고딕"/>
+                <a:ea typeface="맑은 고딕"/>
+              </a:rPr>
+              <a:t> 요구부터 기술 실현까지의 판단을 하나의 사례로 통합하고, 추가 모델링의 가치와 비용을 판단한다.</a:t>
+            </a:r>
+          </a:p>
+        </p:txBody>
+      </p:sp>
+    </p:spTree>
+    <p:extLst>
+      <p:ext uri="{BB962C8B-B14F-4D97-AF65-F5344CB8AC3E}">
+        <p14:creationId xmlns:p14="http://schemas.microsoft.com/office/powerpoint/2010/main" val="3555436673"/>
+      </p:ext>
+    </p:extLst>
+  </p:cSld>
+  <p:clrMapOvr>
+    <a:masterClrMapping/>
+  </p:clrMapOvr>
+</p:sld>
+</file>
+
+<file path=ppt/slides/slide29.xml><?xml version="1.0" encoding="utf-8"?>
 <p:sld xmlns:a="http://schemas.openxmlformats.org/drawingml/2006/main" xmlns:r="http://schemas.openxmlformats.org/officeDocument/2006/relationships" xmlns:p="http://schemas.openxmlformats.org/presentationml/2006/main">
   <p:cSld>
     <p:spTree>
@@ -23722,7 +24340,7 @@
                 <a:latin typeface="맑은 고딕"/>
                 <a:ea typeface="맑은 고딕"/>
               </a:rPr>
-              <a:t>27. 매핑 표 </a:t>
+              <a:t>매핑 표 </a:t>
             </a:r>
             <a:r>
               <a:rPr sz="1800" b="1">
@@ -23733,6 +24351,18 @@
                 <a:ea typeface="맑은 고딕"/>
               </a:rPr>
               <a:t>(안)</a:t>
+            </a:r>
+          </a:p>
+          <a:p>
+            <a:r>
+              <a:rPr sz="1100" b="1">
+                <a:solidFill>
+                  <a:srgbClr val="000000"/>
+                </a:solidFill>
+                <a:latin typeface="맑은 고딕"/>
+                <a:ea typeface="맑은 고딕"/>
+              </a:rPr>
+              <a:t>별첨. 실습 답</a:t>
             </a:r>
           </a:p>
         </p:txBody>
@@ -23760,7 +24390,7 @@
           <a:p>
             <a:r>
               <a:rPr kumimoji="1" lang="en-US" altLang="ko-KR" sz="1400" dirty="0" err="1"/>
-              <a:t>10. 기술 제약과 도메인 의미 보존</a:t>
+              <a:t>별첨: 10. 기술 제약과 도메인 의미 보존</a:t>
             </a:r>
           </a:p>
         </p:txBody>
@@ -25274,7 +25904,7 @@
                 <a:ea typeface="맑은 고딕" panose="020B0503020000020004" pitchFamily="34" charset="-127"/>
                 <a:cs typeface="+mn-cs"/>
               </a:rPr>
-              <a:t>- 28 -</a:t>
+              <a:t>- 29 -</a:t>
             </a:r>
           </a:p>
         </p:txBody>
@@ -25283,820 +25913,6 @@
     <p:extLst>
       <p:ext uri="{BB962C8B-B14F-4D97-AF65-F5344CB8AC3E}">
         <p14:creationId xmlns:p14="http://schemas.microsoft.com/office/powerpoint/2010/main" val="2789569477"/>
-      </p:ext>
-    </p:extLst>
-  </p:cSld>
-  <p:clrMapOvr>
-    <a:masterClrMapping/>
-  </p:clrMapOvr>
-</p:sld>
-</file>
-
-<file path=ppt/slides/slide29.xml><?xml version="1.0" encoding="utf-8"?>
-<p:sld xmlns:a="http://schemas.openxmlformats.org/drawingml/2006/main" xmlns:r="http://schemas.openxmlformats.org/officeDocument/2006/relationships" xmlns:p="http://schemas.openxmlformats.org/presentationml/2006/main">
-  <p:cSld>
-    <p:spTree>
-      <p:nvGrpSpPr>
-        <p:cNvPr id="1" name="">
-          <a:extLst>
-            <a:ext uri="{FF2B5EF4-FFF2-40B4-BE49-F238E27FC236}">
-              <a16:creationId xmlns:a16="http://schemas.microsoft.com/office/drawing/2014/main" id="{8E4F1F13-426B-086B-7D8C-9A58A0F879DB}"/>
-            </a:ext>
-          </a:extLst>
-        </p:cNvPr>
-        <p:cNvGrpSpPr/>
-        <p:nvPr/>
-      </p:nvGrpSpPr>
-      <p:grpSpPr>
-        <a:xfrm>
-          <a:off x="0" y="0"/>
-          <a:ext cx="0" cy="0"/>
-          <a:chOff x="0" y="0"/>
-          <a:chExt cx="0" cy="0"/>
-        </a:xfrm>
-      </p:grpSpPr>
-      <p:sp>
-        <p:nvSpPr>
-          <p:cNvPr id="2" name="제목 1">
-            <a:extLst>
-              <a:ext uri="{FF2B5EF4-FFF2-40B4-BE49-F238E27FC236}">
-                <a16:creationId xmlns:a16="http://schemas.microsoft.com/office/drawing/2014/main" id="{AA26A92D-924E-0575-9551-F8FD7BFD3FAD}"/>
-              </a:ext>
-            </a:extLst>
-          </p:cNvPr>
-          <p:cNvSpPr>
-            <a:spLocks noGrp="1"/>
-          </p:cNvSpPr>
-          <p:nvPr>
-            <p:ph type="title"/>
-          </p:nvPr>
-        </p:nvSpPr>
-        <p:spPr/>
-        <p:txBody>
-          <a:bodyPr/>
-          <a:lstStyle/>
-          <a:p>
-            <a:r>
-              <a:rPr sz="2400" b="1">
-                <a:solidFill>
-                  <a:srgbClr val="000000"/>
-                </a:solidFill>
-                <a:latin typeface="맑은 고딕"/>
-                <a:ea typeface="맑은 고딕"/>
-              </a:rPr>
-              <a:t>28. 의미 손실 점검 </a:t>
-            </a:r>
-            <a:r>
-              <a:rPr sz="1800" b="1">
-                <a:solidFill>
-                  <a:srgbClr val="000000"/>
-                </a:solidFill>
-                <a:latin typeface="맑은 고딕"/>
-                <a:ea typeface="맑은 고딕"/>
-              </a:rPr>
-              <a:t>(안)</a:t>
-            </a:r>
-          </a:p>
-        </p:txBody>
-      </p:sp>
-      <p:sp>
-        <p:nvSpPr>
-          <p:cNvPr id="3" name="슬라이드 번호 개체 틀 2">
-            <a:extLst>
-              <a:ext uri="{FF2B5EF4-FFF2-40B4-BE49-F238E27FC236}">
-                <a16:creationId xmlns:a16="http://schemas.microsoft.com/office/drawing/2014/main" id="{12CF30EE-4DFD-8063-56B8-B8689E76DFCA}"/>
-              </a:ext>
-            </a:extLst>
-          </p:cNvPr>
-          <p:cNvSpPr>
-            <a:spLocks noGrp="1"/>
-          </p:cNvSpPr>
-          <p:nvPr>
-            <p:ph type="sldNum" sz="quarter" idx="10"/>
-          </p:nvPr>
-        </p:nvSpPr>
-        <p:spPr/>
-        <p:txBody>
-          <a:bodyPr/>
-          <a:lstStyle/>
-          <a:p>
-            <a:pPr>
-              <a:defRPr/>
-            </a:pPr>
-            <a:r>
-              <a:rPr lang="en-US" altLang="ko-KR">
-                <a:solidFill>
-                  <a:prstClr val="black"/>
-                </a:solidFill>
-              </a:rPr>
-              <a:t>- 29 -</a:t>
-            </a:r>
-          </a:p>
-        </p:txBody>
-      </p:sp>
-      <p:sp>
-        <p:nvSpPr>
-          <p:cNvPr id="5" name="텍스트 개체 틀 4">
-            <a:extLst>
-              <a:ext uri="{FF2B5EF4-FFF2-40B4-BE49-F238E27FC236}">
-                <a16:creationId xmlns:a16="http://schemas.microsoft.com/office/drawing/2014/main" id="{D66274C8-E16F-5AEB-614B-D8D32DA3E8C6}"/>
-              </a:ext>
-            </a:extLst>
-          </p:cNvPr>
-          <p:cNvSpPr>
-            <a:spLocks noGrp="1"/>
-          </p:cNvSpPr>
-          <p:nvPr>
-            <p:ph type="body" sz="quarter" idx="11"/>
-          </p:nvPr>
-        </p:nvSpPr>
-        <p:spPr/>
-        <p:txBody>
-          <a:bodyPr/>
-          <a:lstStyle/>
-          <a:p>
-            <a:r>
-              <a:rPr kumimoji="1" lang="en-US" altLang="ko-KR" sz="1400" dirty="0" err="1"/>
-              <a:t>10. 기술 제약과 도메인 의미 보존</a:t>
-            </a:r>
-          </a:p>
-        </p:txBody>
-      </p:sp>
-      <p:sp>
-        <p:nvSpPr>
-          <p:cNvPr id="6" name="텍스트 개체 틀 5">
-            <a:extLst>
-              <a:ext uri="{FF2B5EF4-FFF2-40B4-BE49-F238E27FC236}">
-                <a16:creationId xmlns:a16="http://schemas.microsoft.com/office/drawing/2014/main" id="{A24E58E1-194B-A320-AEEE-24D08685BB67}"/>
-              </a:ext>
-            </a:extLst>
-          </p:cNvPr>
-          <p:cNvSpPr>
-            <a:spLocks noGrp="1"/>
-          </p:cNvSpPr>
-          <p:nvPr>
-            <p:ph type="body" sz="quarter" idx="12"/>
-          </p:nvPr>
-        </p:nvSpPr>
-        <p:spPr/>
-        <p:txBody>
-          <a:bodyPr/>
-          <a:lstStyle/>
-          <a:p>
-            <a:endParaRPr kumimoji="1" lang="ko-KR" altLang="en-US" dirty="0"/>
-          </a:p>
-        </p:txBody>
-      </p:sp>
-      <p:sp>
-        <p:nvSpPr>
-          <p:cNvPr id="7" name="텍스트 개체 틀 6">
-            <a:extLst>
-              <a:ext uri="{FF2B5EF4-FFF2-40B4-BE49-F238E27FC236}">
-                <a16:creationId xmlns:a16="http://schemas.microsoft.com/office/drawing/2014/main" id="{A219F420-613B-6234-45F6-0955A9A4505F}"/>
-              </a:ext>
-            </a:extLst>
-          </p:cNvPr>
-          <p:cNvSpPr>
-            <a:spLocks noGrp="1"/>
-          </p:cNvSpPr>
-          <p:nvPr>
-            <p:ph type="body" sz="quarter" idx="13"/>
-          </p:nvPr>
-        </p:nvSpPr>
-        <p:spPr/>
-        <p:txBody>
-          <a:bodyPr/>
-          <a:lstStyle/>
-          <a:p>
-            <a:endParaRPr kumimoji="1" lang="en-US" altLang="ko-KR" dirty="0"/>
-          </a:p>
-        </p:txBody>
-      </p:sp>
-      <p:sp>
-        <p:nvSpPr>
-          <p:cNvPr id="8" name="내용 개체 틀 7">
-            <a:extLst>
-              <a:ext uri="{FF2B5EF4-FFF2-40B4-BE49-F238E27FC236}">
-                <a16:creationId xmlns:a16="http://schemas.microsoft.com/office/drawing/2014/main" id="{BEBA2C4A-B0BF-F2E4-EA6E-614C99CBA184}"/>
-              </a:ext>
-            </a:extLst>
-          </p:cNvPr>
-          <p:cNvSpPr>
-            <a:spLocks noGrp="1"/>
-          </p:cNvSpPr>
-          <p:nvPr>
-            <p:ph idx="1"/>
-          </p:nvPr>
-        </p:nvSpPr>
-        <p:spPr>
-          <a:xfrm>
-            <a:off x="233172" y="1414318"/>
-            <a:ext cx="4338828" cy="4898147"/>
-          </a:xfrm>
-        </p:spPr>
-        <p:txBody>
-          <a:bodyPr>
-            <a:normAutofit/>
-          </a:bodyPr>
-          <a:lstStyle/>
-          <a:p>
-            <a:pPr lvl="2" marL="228600" indent="-182880">
-              <a:spcBef>
-                <a:spcPts val="300"/>
-              </a:spcBef>
-              <a:spcAft>
-                <a:spcPts val="300"/>
-              </a:spcAft>
-              <a:buSzPct val="90000"/>
-              <a:buFont typeface="Wingdings" pitchFamily="2" charset="2"/>
-              <a:buChar char=""/>
-            </a:pPr>
-            <a:r>
-              <a:rPr sz="1400" b="1">
-                <a:solidFill>
-                  <a:srgbClr val="000000"/>
-                </a:solidFill>
-                <a:latin typeface="맑은 고딕"/>
-                <a:ea typeface="맑은 고딕"/>
-              </a:rPr>
-              <a:t>상태 값</a:t>
-            </a:r>
-          </a:p>
-          <a:p>
-            <a:pPr lvl="3" marL="457200" indent="-182880">
-              <a:spcBef>
-                <a:spcPts val="300"/>
-              </a:spcBef>
-              <a:spcAft>
-                <a:spcPts val="300"/>
-              </a:spcAft>
-              <a:buSzPct val="90000"/>
-              <a:buFont typeface="Wingdings" pitchFamily="2" charset="2"/>
-              <a:buChar char=""/>
-            </a:pPr>
-            <a:r>
-              <a:rPr sz="1200" b="1">
-                <a:solidFill>
-                  <a:srgbClr val="000000"/>
-                </a:solidFill>
-                <a:latin typeface="맑은 고딕"/>
-                <a:ea typeface="맑은 고딕"/>
-              </a:rPr>
-              <a:t>위험</a:t>
-            </a:r>
-            <a:r>
-              <a:rPr sz="1200" b="0">
-                <a:solidFill>
-                  <a:srgbClr val="000000"/>
-                </a:solidFill>
-                <a:latin typeface="맑은 고딕"/>
-                <a:ea typeface="맑은 고딕"/>
-              </a:rPr>
-              <a:t> —</a:t>
-            </a:r>
-            <a:r>
-              <a:rPr sz="1000" b="0">
-                <a:solidFill>
-                  <a:srgbClr val="000000"/>
-                </a:solidFill>
-                <a:latin typeface="맑은 고딕"/>
-                <a:ea typeface="맑은 고딕"/>
-              </a:rPr>
-              <a:t> 정기배송 상태를 순번으로 저장하면 값 추가 때 의미가 바뀐다.</a:t>
-            </a:r>
-          </a:p>
-          <a:p>
-            <a:pPr lvl="3" marL="457200" indent="-182880">
-              <a:spcBef>
-                <a:spcPts val="300"/>
-              </a:spcBef>
-              <a:spcAft>
-                <a:spcPts val="300"/>
-              </a:spcAft>
-              <a:buSzPct val="90000"/>
-              <a:buFont typeface="Wingdings" pitchFamily="2" charset="2"/>
-              <a:buChar char=""/>
-            </a:pPr>
-            <a:r>
-              <a:rPr sz="1200" b="1">
-                <a:solidFill>
-                  <a:srgbClr val="000000"/>
-                </a:solidFill>
-                <a:latin typeface="맑은 고딕"/>
-                <a:ea typeface="맑은 고딕"/>
-              </a:rPr>
-              <a:t>테스트</a:t>
-            </a:r>
-            <a:r>
-              <a:rPr sz="1200" b="0">
-                <a:solidFill>
-                  <a:srgbClr val="000000"/>
-                </a:solidFill>
-                <a:latin typeface="맑은 고딕"/>
-                <a:ea typeface="맑은 고딕"/>
-              </a:rPr>
-              <a:t> —</a:t>
-            </a:r>
-            <a:r>
-              <a:rPr sz="1000" b="0">
-                <a:solidFill>
-                  <a:srgbClr val="000000"/>
-                </a:solidFill>
-                <a:latin typeface="맑은 고딕"/>
-                <a:ea typeface="맑은 고딕"/>
-              </a:rPr>
-              <a:t> </a:t>
-            </a:r>
-            <a:r>
-              <a:rPr sz="1000" b="0">
-                <a:solidFill>
-                  <a:srgbClr val="000000"/>
-                </a:solidFill>
-                <a:latin typeface="맑은 고딕"/>
-                <a:ea typeface="맑은 고딕"/>
-              </a:rPr>
-              <a:t>CONFIRMED</a:t>
-            </a:r>
-            <a:r>
-              <a:rPr sz="1000" b="0">
-                <a:solidFill>
-                  <a:srgbClr val="000000"/>
-                </a:solidFill>
-                <a:latin typeface="맑은 고딕"/>
-                <a:ea typeface="맑은 고딕"/>
-              </a:rPr>
-              <a:t>로 저장·복원해 같은 상태인가</a:t>
-            </a:r>
-          </a:p>
-          <a:p>
-            <a:pPr lvl="2" marL="228600" indent="-182880">
-              <a:spcBef>
-                <a:spcPts val="300"/>
-              </a:spcBef>
-              <a:spcAft>
-                <a:spcPts val="300"/>
-              </a:spcAft>
-              <a:buSzPct val="90000"/>
-              <a:buFont typeface="Wingdings" pitchFamily="2" charset="2"/>
-              <a:buChar char=""/>
-            </a:pPr>
-            <a:r>
-              <a:rPr sz="1400" b="1">
-                <a:solidFill>
-                  <a:srgbClr val="000000"/>
-                </a:solidFill>
-                <a:latin typeface="맑은 고딕"/>
-                <a:ea typeface="맑은 고딕"/>
-              </a:rPr>
-              <a:t>확정 단가</a:t>
-            </a:r>
-          </a:p>
-          <a:p>
-            <a:pPr lvl="3" marL="457200" indent="-182880">
-              <a:spcBef>
-                <a:spcPts val="300"/>
-              </a:spcBef>
-              <a:spcAft>
-                <a:spcPts val="300"/>
-              </a:spcAft>
-              <a:buSzPct val="90000"/>
-              <a:buFont typeface="Wingdings" pitchFamily="2" charset="2"/>
-              <a:buChar char=""/>
-            </a:pPr>
-            <a:r>
-              <a:rPr sz="1200" b="1">
-                <a:solidFill>
-                  <a:srgbClr val="000000"/>
-                </a:solidFill>
-                <a:latin typeface="맑은 고딕"/>
-                <a:ea typeface="맑은 고딕"/>
-              </a:rPr>
-              <a:t>위험</a:t>
-            </a:r>
-            <a:r>
-              <a:rPr sz="1200" b="0">
-                <a:solidFill>
-                  <a:srgbClr val="000000"/>
-                </a:solidFill>
-                <a:latin typeface="맑은 고딕"/>
-                <a:ea typeface="맑은 고딕"/>
-              </a:rPr>
-              <a:t> —</a:t>
-            </a:r>
-            <a:r>
-              <a:rPr sz="1000" b="0">
-                <a:solidFill>
-                  <a:srgbClr val="000000"/>
-                </a:solidFill>
-                <a:latin typeface="맑은 고딕"/>
-                <a:ea typeface="맑은 고딕"/>
-              </a:rPr>
-              <a:t> 상품 가격으로 다시 계산하면 R4</a:t>
-            </a:r>
-            <a:r>
-              <a:rPr sz="800" b="0">
-                <a:solidFill>
-                  <a:srgbClr val="000000"/>
-                </a:solidFill>
-                <a:latin typeface="맑은 고딕"/>
-                <a:ea typeface="맑은 고딕"/>
-              </a:rPr>
-              <a:t>(신청 때 가격)</a:t>
-            </a:r>
-            <a:r>
-              <a:rPr sz="1000" b="0">
-                <a:solidFill>
-                  <a:srgbClr val="000000"/>
-                </a:solidFill>
-                <a:latin typeface="맑은 고딕"/>
-                <a:ea typeface="맑은 고딕"/>
-              </a:rPr>
-              <a:t>가 깨진다.</a:t>
-            </a:r>
-          </a:p>
-          <a:p>
-            <a:pPr lvl="3" marL="457200" indent="-182880">
-              <a:spcBef>
-                <a:spcPts val="300"/>
-              </a:spcBef>
-              <a:spcAft>
-                <a:spcPts val="300"/>
-              </a:spcAft>
-              <a:buSzPct val="90000"/>
-              <a:buFont typeface="Wingdings" pitchFamily="2" charset="2"/>
-              <a:buChar char=""/>
-            </a:pPr>
-            <a:r>
-              <a:rPr sz="1200" b="1">
-                <a:solidFill>
-                  <a:srgbClr val="000000"/>
-                </a:solidFill>
-                <a:latin typeface="맑은 고딕"/>
-                <a:ea typeface="맑은 고딕"/>
-              </a:rPr>
-              <a:t>테스트</a:t>
-            </a:r>
-            <a:r>
-              <a:rPr sz="1200" b="0">
-                <a:solidFill>
-                  <a:srgbClr val="000000"/>
-                </a:solidFill>
-                <a:latin typeface="맑은 고딕"/>
-                <a:ea typeface="맑은 고딕"/>
-              </a:rPr>
-              <a:t> —</a:t>
-            </a:r>
-            <a:r>
-              <a:rPr sz="1000" b="0">
-                <a:solidFill>
-                  <a:srgbClr val="000000"/>
-                </a:solidFill>
-                <a:latin typeface="맑은 고딕"/>
-                <a:ea typeface="맑은 고딕"/>
-              </a:rPr>
-              <a:t> 상품 가격을 바꾼 뒤 복원한 회차 금액이 같은가</a:t>
-            </a:r>
-          </a:p>
-        </p:txBody>
-      </p:sp>
-      <p:sp>
-        <p:nvSpPr>
-          <p:cNvPr id="9" name="내용 개체 틀 7">
-            <a:extLst>
-              <a:ext uri="{FF2B5EF4-FFF2-40B4-BE49-F238E27FC236}">
-                <a16:creationId xmlns:a16="http://schemas.microsoft.com/office/drawing/2014/main" id="{BEBA2C4A-B0BF-F2E4-EA6E-614C99CBA184}"/>
-              </a:ext>
-            </a:extLst>
-          </p:cNvPr>
-          <p:cNvSpPr>
-            <a:spLocks noGrp="1"/>
-          </p:cNvSpPr>
-          <p:nvPr>
-            <p:ph idx="1"/>
-          </p:nvPr>
-        </p:nvSpPr>
-        <p:spPr>
-          <a:xfrm>
-            <a:off x="233172" y="960120"/>
-            <a:ext cx="8778240" cy="454198"/>
-          </a:xfrm>
-        </p:spPr>
-        <p:txBody>
-          <a:bodyPr>
-            <a:normAutofit/>
-          </a:bodyPr>
-          <a:lstStyle/>
-          <a:p>
-            <a:pPr marL="0" indent="0">
-              <a:spcBef>
-                <a:spcPts val="300"/>
-              </a:spcBef>
-              <a:spcAft>
-                <a:spcPts val="300"/>
-              </a:spcAft>
-              <a:buNone/>
-            </a:pPr>
-            <a:r>
-              <a:rPr sz="1400" b="0">
-                <a:solidFill>
-                  <a:srgbClr val="000000"/>
-                </a:solidFill>
-                <a:latin typeface="맑은 고딕"/>
-                <a:ea typeface="맑은 고딕"/>
-              </a:rPr>
-              <a:t>매핑의 위험을 </a:t>
-            </a:r>
-            <a:r>
-              <a:rPr sz="1400" b="1">
-                <a:solidFill>
-                  <a:srgbClr val="000000"/>
-                </a:solidFill>
-                <a:latin typeface="맑은 고딕"/>
-                <a:ea typeface="맑은 고딕"/>
-              </a:rPr>
-              <a:t>네 곳</a:t>
-            </a:r>
-            <a:r>
-              <a:rPr sz="1400" b="0">
-                <a:solidFill>
-                  <a:srgbClr val="000000"/>
-                </a:solidFill>
-                <a:latin typeface="맑은 고딕"/>
-                <a:ea typeface="맑은 고딕"/>
-              </a:rPr>
-              <a:t>에서 찾고, 각각 라운드트립 테스트 하나로 확인한다.</a:t>
-            </a:r>
-          </a:p>
-        </p:txBody>
-      </p:sp>
-      <p:sp>
-        <p:nvSpPr>
-          <p:cNvPr id="10" name="내용 개체 틀 7">
-            <a:extLst>
-              <a:ext uri="{FF2B5EF4-FFF2-40B4-BE49-F238E27FC236}">
-                <a16:creationId xmlns:a16="http://schemas.microsoft.com/office/drawing/2014/main" id="{BEBA2C4A-B0BF-F2E4-EA6E-614C99CBA184}"/>
-              </a:ext>
-            </a:extLst>
-          </p:cNvPr>
-          <p:cNvSpPr>
-            <a:spLocks noGrp="1"/>
-          </p:cNvSpPr>
-          <p:nvPr>
-            <p:ph idx="1"/>
-          </p:nvPr>
-        </p:nvSpPr>
-        <p:spPr>
-          <a:xfrm>
-            <a:off x="4572000" y="1414318"/>
-            <a:ext cx="4439412" cy="4898147"/>
-          </a:xfrm>
-        </p:spPr>
-        <p:txBody>
-          <a:bodyPr>
-            <a:normAutofit/>
-          </a:bodyPr>
-          <a:lstStyle/>
-          <a:p>
-            <a:pPr lvl="2" marL="228600" indent="-182880">
-              <a:spcBef>
-                <a:spcPts val="300"/>
-              </a:spcBef>
-              <a:spcAft>
-                <a:spcPts val="300"/>
-              </a:spcAft>
-              <a:buSzPct val="90000"/>
-              <a:buFont typeface="Wingdings" pitchFamily="2" charset="2"/>
-              <a:buChar char=""/>
-            </a:pPr>
-            <a:r>
-              <a:rPr sz="1400" b="1">
-                <a:solidFill>
-                  <a:srgbClr val="000000"/>
-                </a:solidFill>
-                <a:latin typeface="맑은 고딕"/>
-                <a:ea typeface="맑은 고딕"/>
-              </a:rPr>
-              <a:t>배송 주기</a:t>
-            </a:r>
-          </a:p>
-          <a:p>
-            <a:pPr lvl="3" marL="457200" indent="-182880">
-              <a:spcBef>
-                <a:spcPts val="300"/>
-              </a:spcBef>
-              <a:spcAft>
-                <a:spcPts val="300"/>
-              </a:spcAft>
-              <a:buSzPct val="90000"/>
-              <a:buFont typeface="Wingdings" pitchFamily="2" charset="2"/>
-              <a:buChar char=""/>
-            </a:pPr>
-            <a:r>
-              <a:rPr sz="1200" b="1">
-                <a:solidFill>
-                  <a:srgbClr val="000000"/>
-                </a:solidFill>
-                <a:latin typeface="맑은 고딕"/>
-                <a:ea typeface="맑은 고딕"/>
-              </a:rPr>
-              <a:t>위험</a:t>
-            </a:r>
-            <a:r>
-              <a:rPr sz="1200" b="0">
-                <a:solidFill>
-                  <a:srgbClr val="000000"/>
-                </a:solidFill>
-                <a:latin typeface="맑은 고딕"/>
-                <a:ea typeface="맑은 고딕"/>
-              </a:rPr>
-              <a:t> —</a:t>
-            </a:r>
-            <a:r>
-              <a:rPr sz="1000" b="0">
-                <a:solidFill>
-                  <a:srgbClr val="000000"/>
-                </a:solidFill>
-                <a:latin typeface="맑은 고딕"/>
-                <a:ea typeface="맑은 고딕"/>
-              </a:rPr>
-              <a:t> 종류를 저장하지 않으면 매월 15일이 15일 간격이 된다.</a:t>
-            </a:r>
-          </a:p>
-          <a:p>
-            <a:pPr lvl="3" marL="457200" indent="-182880">
-              <a:spcBef>
-                <a:spcPts val="300"/>
-              </a:spcBef>
-              <a:spcAft>
-                <a:spcPts val="300"/>
-              </a:spcAft>
-              <a:buSzPct val="90000"/>
-              <a:buFont typeface="Wingdings" pitchFamily="2" charset="2"/>
-              <a:buChar char=""/>
-            </a:pPr>
-            <a:r>
-              <a:rPr sz="1200" b="1">
-                <a:solidFill>
-                  <a:srgbClr val="000000"/>
-                </a:solidFill>
-                <a:latin typeface="맑은 고딕"/>
-                <a:ea typeface="맑은 고딕"/>
-              </a:rPr>
-              <a:t>테스트</a:t>
-            </a:r>
-            <a:r>
-              <a:rPr sz="1200" b="0">
-                <a:solidFill>
-                  <a:srgbClr val="000000"/>
-                </a:solidFill>
-                <a:latin typeface="맑은 고딕"/>
-                <a:ea typeface="맑은 고딕"/>
-              </a:rPr>
-              <a:t> —</a:t>
-            </a:r>
-            <a:r>
-              <a:rPr sz="1000" b="0">
-                <a:solidFill>
-                  <a:srgbClr val="000000"/>
-                </a:solidFill>
-                <a:latin typeface="맑은 고딕"/>
-                <a:ea typeface="맑은 고딕"/>
-              </a:rPr>
-              <a:t> </a:t>
-            </a:r>
-            <a:r>
-              <a:rPr sz="1000" b="0">
-                <a:solidFill>
-                  <a:srgbClr val="000000"/>
-                </a:solidFill>
-                <a:latin typeface="맑은 고딕"/>
-                <a:ea typeface="맑은 고딕"/>
-              </a:rPr>
-              <a:t>MonthlyCycle(15)</a:t>
-            </a:r>
-            <a:r>
-              <a:rPr sz="1000" b="0">
-                <a:solidFill>
-                  <a:srgbClr val="000000"/>
-                </a:solidFill>
-                <a:latin typeface="맑은 고딕"/>
-                <a:ea typeface="맑은 고딕"/>
-              </a:rPr>
-              <a:t>로 저장·복원해 다음 배송일이 같은가</a:t>
-            </a:r>
-          </a:p>
-          <a:p>
-            <a:pPr lvl="2" marL="228600" indent="-182880">
-              <a:spcBef>
-                <a:spcPts val="300"/>
-              </a:spcBef>
-              <a:spcAft>
-                <a:spcPts val="300"/>
-              </a:spcAft>
-              <a:buSzPct val="90000"/>
-              <a:buFont typeface="Wingdings" pitchFamily="2" charset="2"/>
-              <a:buChar char=""/>
-            </a:pPr>
-            <a:r>
-              <a:rPr sz="1400" b="1">
-                <a:solidFill>
-                  <a:srgbClr val="000000"/>
-                </a:solidFill>
-                <a:latin typeface="맑은 고딕"/>
-                <a:ea typeface="맑은 고딕"/>
-              </a:rPr>
-              <a:t>복원 규칙</a:t>
-            </a:r>
-          </a:p>
-          <a:p>
-            <a:pPr lvl="3" marL="457200" indent="-182880">
-              <a:spcBef>
-                <a:spcPts val="300"/>
-              </a:spcBef>
-              <a:spcAft>
-                <a:spcPts val="300"/>
-              </a:spcAft>
-              <a:buSzPct val="90000"/>
-              <a:buFont typeface="Wingdings" pitchFamily="2" charset="2"/>
-              <a:buChar char=""/>
-            </a:pPr>
-            <a:r>
-              <a:rPr sz="1200" b="1">
-                <a:solidFill>
-                  <a:srgbClr val="000000"/>
-                </a:solidFill>
-                <a:latin typeface="맑은 고딕"/>
-                <a:ea typeface="맑은 고딕"/>
-              </a:rPr>
-              <a:t>테스트</a:t>
-            </a:r>
-            <a:r>
-              <a:rPr sz="1200" b="0">
-                <a:solidFill>
-                  <a:srgbClr val="000000"/>
-                </a:solidFill>
-                <a:latin typeface="맑은 고딕"/>
-                <a:ea typeface="맑은 고딕"/>
-              </a:rPr>
-              <a:t> —</a:t>
-            </a:r>
-            <a:r>
-              <a:rPr sz="1000" b="0">
-                <a:solidFill>
-                  <a:srgbClr val="000000"/>
-                </a:solidFill>
-                <a:latin typeface="맑은 고딕"/>
-                <a:ea typeface="맑은 고딕"/>
-              </a:rPr>
-              <a:t> </a:t>
-            </a:r>
-            <a:r>
-              <a:rPr sz="1000" b="0">
-                <a:solidFill>
-                  <a:srgbClr val="000000"/>
-                </a:solidFill>
-                <a:latin typeface="맑은 고딕"/>
-                <a:ea typeface="맑은 고딕"/>
-              </a:rPr>
-              <a:t>cycle_value = 30</a:t>
-            </a:r>
-            <a:r>
-              <a:rPr sz="1000" b="0">
-                <a:solidFill>
-                  <a:srgbClr val="000000"/>
-                </a:solidFill>
-                <a:latin typeface="맑은 고딕"/>
-                <a:ea typeface="맑은 고딕"/>
-              </a:rPr>
-              <a:t>, </a:t>
-            </a:r>
-            <a:r>
-              <a:rPr sz="1000" b="0">
-                <a:solidFill>
-                  <a:srgbClr val="000000"/>
-                </a:solidFill>
-                <a:latin typeface="맑은 고딕"/>
-                <a:ea typeface="맑은 고딕"/>
-              </a:rPr>
-              <a:t>term_months = 0</a:t>
-            </a:r>
-            <a:r>
-              <a:rPr sz="1000" b="0">
-                <a:solidFill>
-                  <a:srgbClr val="000000"/>
-                </a:solidFill>
-                <a:latin typeface="맑은 고딕"/>
-                <a:ea typeface="맑은 고딕"/>
-              </a:rPr>
-              <a:t>인 행은 복원이 실패하는가</a:t>
-            </a:r>
-          </a:p>
-        </p:txBody>
-      </p:sp>
-    </p:spTree>
-    <p:extLst>
-      <p:ext uri="{BB962C8B-B14F-4D97-AF65-F5344CB8AC3E}">
-        <p14:creationId xmlns:p14="http://schemas.microsoft.com/office/powerpoint/2010/main" val="3555436673"/>
       </p:ext>
     </p:extLst>
   </p:cSld>
@@ -27079,7 +26895,7 @@
                 <a:latin typeface="맑은 고딕"/>
                 <a:ea typeface="맑은 고딕"/>
               </a:rPr>
-              <a:t>29. 기술 제약 보완 </a:t>
+              <a:t>의미 손실 점검 </a:t>
             </a:r>
             <a:r>
               <a:rPr sz="1800" b="1">
@@ -27090,6 +26906,18 @@
                 <a:ea typeface="맑은 고딕"/>
               </a:rPr>
               <a:t>(안)</a:t>
+            </a:r>
+          </a:p>
+          <a:p>
+            <a:r>
+              <a:rPr sz="1100" b="1">
+                <a:solidFill>
+                  <a:srgbClr val="000000"/>
+                </a:solidFill>
+                <a:latin typeface="맑은 고딕"/>
+                <a:ea typeface="맑은 고딕"/>
+              </a:rPr>
+              <a:t>별첨. 실습 답</a:t>
             </a:r>
           </a:p>
         </p:txBody>
@@ -27152,7 +26980,7 @@
           <a:p>
             <a:r>
               <a:rPr kumimoji="1" lang="en-US" altLang="ko-KR" sz="1400" dirty="0" err="1"/>
-              <a:t>10. 기술 제약과 도메인 의미 보존</a:t>
+              <a:t>별첨: 10. 기술 제약과 도메인 의미 보존</a:t>
             </a:r>
           </a:p>
         </p:txBody>
@@ -27254,17 +27082,7 @@
                 <a:latin typeface="맑은 고딕"/>
                 <a:ea typeface="맑은 고딕"/>
               </a:rPr>
-              <a:t>용어집</a:t>
-            </a:r>
-            <a:r>
-              <a:rPr sz="1000" b="0">
-                <a:solidFill>
-                  <a:srgbClr val="000000"/>
-                </a:solidFill>
-                <a:latin typeface="맑은 고딕"/>
-                <a:ea typeface="맑은 고딕"/>
-              </a:rPr>
-              <a:t>(실습 2)</a:t>
+              <a:t>상태 값</a:t>
             </a:r>
           </a:p>
           <a:p>
@@ -27287,7 +27105,7 @@
                 <a:latin typeface="맑은 고딕"/>
                 <a:ea typeface="맑은 고딕"/>
               </a:rPr>
-              <a:t>새 용어</a:t>
+              <a:t>위험</a:t>
             </a:r>
             <a:r>
               <a:rPr sz="1200" b="0">
@@ -27307,7 +27125,40 @@
                 <a:latin typeface="맑은 고딕"/>
                 <a:ea typeface="맑은 고딕"/>
               </a:rPr>
-              <a:t> 주기 종류 </a:t>
+              <a:t> 정기배송 상태를 순번으로 저장하면 값 추가 때 의미가 바뀐다.</a:t>
+            </a:r>
+          </a:p>
+          <a:p>
+            <a:pPr lvl="3" marL="457200" indent="-182880">
+              <a:spcBef>
+                <a:spcPts val="300"/>
+              </a:spcBef>
+              <a:spcAft>
+                <a:spcPts val="300"/>
+              </a:spcAft>
+              <a:buSzPct val="90000"/>
+              <a:buFont typeface="Wingdings" pitchFamily="2" charset="2"/>
+              <a:buChar char=""/>
+            </a:pPr>
+            <a:r>
+              <a:rPr sz="1200" b="1">
+                <a:solidFill>
+                  <a:srgbClr val="000000"/>
+                </a:solidFill>
+                <a:latin typeface="맑은 고딕"/>
+                <a:ea typeface="맑은 고딕"/>
+              </a:rPr>
+              <a:t>테스트</a:t>
+            </a:r>
+            <a:r>
+              <a:rPr sz="1200" b="0">
+                <a:solidFill>
+                  <a:srgbClr val="000000"/>
+                </a:solidFill>
+                <a:latin typeface="맑은 고딕"/>
+                <a:ea typeface="맑은 고딕"/>
+              </a:rPr>
+              <a:t> —</a:t>
             </a:r>
             <a:r>
               <a:rPr sz="1000" b="0">
@@ -27317,7 +27168,7 @@
                 <a:latin typeface="맑은 고딕"/>
                 <a:ea typeface="맑은 고딕"/>
               </a:rPr>
-              <a:t>CycleType</a:t>
+              <a:t> </a:t>
             </a:r>
             <a:r>
               <a:rPr sz="1000" b="0">
@@ -27327,7 +27178,7 @@
                 <a:latin typeface="맑은 고딕"/>
                 <a:ea typeface="맑은 고딕"/>
               </a:rPr>
-              <a:t>(</a:t>
+              <a:t>CONFIRMED</a:t>
             </a:r>
             <a:r>
               <a:rPr sz="1000" b="0">
@@ -27337,47 +27188,7 @@
                 <a:latin typeface="맑은 고딕"/>
                 <a:ea typeface="맑은 고딕"/>
               </a:rPr>
-              <a:t>DAILY</a:t>
-            </a:r>
-            <a:r>
-              <a:rPr sz="1000" b="0">
-                <a:solidFill>
-                  <a:srgbClr val="000000"/>
-                </a:solidFill>
-                <a:latin typeface="맑은 고딕"/>
-                <a:ea typeface="맑은 고딕"/>
-              </a:rPr>
-              <a:t>, </a:t>
-            </a:r>
-            <a:r>
-              <a:rPr sz="1000" b="0">
-                <a:solidFill>
-                  <a:srgbClr val="000000"/>
-                </a:solidFill>
-                <a:latin typeface="맑은 고딕"/>
-                <a:ea typeface="맑은 고딕"/>
-              </a:rPr>
-              <a:t>MONTHLY</a:t>
-            </a:r>
-            <a:r>
-              <a:rPr sz="1000" b="0">
-                <a:solidFill>
-                  <a:srgbClr val="000000"/>
-                </a:solidFill>
-                <a:latin typeface="맑은 고딕"/>
-                <a:ea typeface="맑은 고딕"/>
-              </a:rPr>
-              <a:t>), 정기배송 행 </a:t>
-            </a:r>
-            <a:r>
-              <a:rPr sz="1000" b="0">
-                <a:solidFill>
-                  <a:srgbClr val="000000"/>
-                </a:solidFill>
-                <a:latin typeface="맑은 고딕"/>
-                <a:ea typeface="맑은 고딕"/>
-              </a:rPr>
-              <a:t>SubscriptionRow</a:t>
+              <a:t>로 저장·복원해 같은 상태인가</a:t>
             </a:r>
           </a:p>
           <a:p>
@@ -27400,17 +27211,7 @@
                 <a:latin typeface="맑은 고딕"/>
                 <a:ea typeface="맑은 고딕"/>
               </a:rPr>
-              <a:t>설계 클래스 다이어그램</a:t>
-            </a:r>
-            <a:r>
-              <a:rPr sz="1000" b="0">
-                <a:solidFill>
-                  <a:srgbClr val="000000"/>
-                </a:solidFill>
-                <a:latin typeface="맑은 고딕"/>
-                <a:ea typeface="맑은 고딕"/>
-              </a:rPr>
-              <a:t>(실습 8)</a:t>
+              <a:t>확정 단가</a:t>
             </a:r>
           </a:p>
           <a:p>
@@ -27433,7 +27234,7 @@
                 <a:latin typeface="맑은 고딕"/>
                 <a:ea typeface="맑은 고딕"/>
               </a:rPr>
-              <a:t>복원</a:t>
+              <a:t>위험</a:t>
             </a:r>
             <a:r>
               <a:rPr sz="1200" b="0">
@@ -27453,7 +27254,17 @@
                 <a:latin typeface="맑은 고딕"/>
                 <a:ea typeface="맑은 고딕"/>
               </a:rPr>
-              <a:t> </a:t>
+              <a:t> 상품 가격으로 다시 계산하면 R4</a:t>
+            </a:r>
+            <a:r>
+              <a:rPr sz="800" b="0">
+                <a:solidFill>
+                  <a:srgbClr val="000000"/>
+                </a:solidFill>
+                <a:latin typeface="맑은 고딕"/>
+                <a:ea typeface="맑은 고딕"/>
+              </a:rPr>
+              <a:t>(신청 때 가격)</a:t>
             </a:r>
             <a:r>
               <a:rPr sz="1000" b="0">
@@ -27463,7 +27274,40 @@
                 <a:latin typeface="맑은 고딕"/>
                 <a:ea typeface="맑은 고딕"/>
               </a:rPr>
-              <a:t>Subscription.restore</a:t>
+              <a:t>가 깨진다.</a:t>
+            </a:r>
+          </a:p>
+          <a:p>
+            <a:pPr lvl="3" marL="457200" indent="-182880">
+              <a:spcBef>
+                <a:spcPts val="300"/>
+              </a:spcBef>
+              <a:spcAft>
+                <a:spcPts val="300"/>
+              </a:spcAft>
+              <a:buSzPct val="90000"/>
+              <a:buFont typeface="Wingdings" pitchFamily="2" charset="2"/>
+              <a:buChar char=""/>
+            </a:pPr>
+            <a:r>
+              <a:rPr sz="1200" b="1">
+                <a:solidFill>
+                  <a:srgbClr val="000000"/>
+                </a:solidFill>
+                <a:latin typeface="맑은 고딕"/>
+                <a:ea typeface="맑은 고딕"/>
+              </a:rPr>
+              <a:t>테스트</a:t>
+            </a:r>
+            <a:r>
+              <a:rPr sz="1200" b="0">
+                <a:solidFill>
+                  <a:srgbClr val="000000"/>
+                </a:solidFill>
+                <a:latin typeface="맑은 고딕"/>
+                <a:ea typeface="맑은 고딕"/>
+              </a:rPr>
+              <a:t> —</a:t>
             </a:r>
             <a:r>
               <a:rPr sz="1000" b="0">
@@ -27473,47 +27317,7 @@
                 <a:latin typeface="맑은 고딕"/>
                 <a:ea typeface="맑은 고딕"/>
               </a:rPr>
-              <a:t>, </a:t>
-            </a:r>
-            <a:r>
-              <a:rPr sz="1000" b="0">
-                <a:solidFill>
-                  <a:srgbClr val="000000"/>
-                </a:solidFill>
-                <a:latin typeface="맑은 고딕"/>
-                <a:ea typeface="맑은 고딕"/>
-              </a:rPr>
-              <a:t>DailyCycle</a:t>
-            </a:r>
-            <a:r>
-              <a:rPr sz="1000" b="0">
-                <a:solidFill>
-                  <a:srgbClr val="000000"/>
-                </a:solidFill>
-                <a:latin typeface="맑은 고딕"/>
-                <a:ea typeface="맑은 고딕"/>
-              </a:rPr>
-              <a:t>·</a:t>
-            </a:r>
-            <a:r>
-              <a:rPr sz="1000" b="0">
-                <a:solidFill>
-                  <a:srgbClr val="000000"/>
-                </a:solidFill>
-                <a:latin typeface="맑은 고딕"/>
-                <a:ea typeface="맑은 고딕"/>
-              </a:rPr>
-              <a:t>MonthlyCycle</a:t>
-            </a:r>
-            <a:r>
-              <a:rPr sz="1000" b="0">
-                <a:solidFill>
-                  <a:srgbClr val="000000"/>
-                </a:solidFill>
-                <a:latin typeface="맑은 고딕"/>
-                <a:ea typeface="맑은 고딕"/>
-              </a:rPr>
-              <a:t>의 생성 규칙을 복원에도 쓴다.</a:t>
+              <a:t> 상품 가격을 바꾼 뒤 복원한 회차 금액이 같은가</a:t>
             </a:r>
           </a:p>
         </p:txBody>
@@ -27563,7 +27367,7 @@
                 <a:latin typeface="맑은 고딕"/>
                 <a:ea typeface="맑은 고딕"/>
               </a:rPr>
-              <a:t>매핑을 설계하며 발견한 것은 </a:t>
+              <a:t>매핑의 위험을 </a:t>
             </a:r>
             <a:r>
               <a:rPr sz="1400" b="1">
@@ -27573,7 +27377,7 @@
                 <a:latin typeface="맑은 고딕"/>
                 <a:ea typeface="맑은 고딕"/>
               </a:rPr>
-              <a:t>후속 작업에 영향을 미치는 경우에만</a:t>
+              <a:t>네 곳</a:t>
             </a:r>
             <a:r>
               <a:rPr sz="1400" b="0">
@@ -27583,7 +27387,7 @@
                 <a:latin typeface="맑은 고딕"/>
                 <a:ea typeface="맑은 고딕"/>
               </a:rPr>
-              <a:t> 이전 산출물에 반영한다.</a:t>
+              <a:t>에서 찾고, 각각 라운드트립 테스트 하나로 확인한다.</a:t>
             </a:r>
           </a:p>
         </p:txBody>
@@ -27635,17 +27439,7 @@
                 <a:latin typeface="맑은 고딕"/>
                 <a:ea typeface="맑은 고딕"/>
               </a:rPr>
-              <a:t>결정 기록</a:t>
-            </a:r>
-            <a:r>
-              <a:rPr sz="1000" b="0">
-                <a:solidFill>
-                  <a:srgbClr val="000000"/>
-                </a:solidFill>
-                <a:latin typeface="맑은 고딕"/>
-                <a:ea typeface="맑은 고딕"/>
-              </a:rPr>
-              <a:t>(실습 9)</a:t>
+              <a:t>배송 주기</a:t>
             </a:r>
           </a:p>
           <a:p>
@@ -27668,7 +27462,7 @@
                 <a:latin typeface="맑은 고딕"/>
                 <a:ea typeface="맑은 고딕"/>
               </a:rPr>
-              <a:t>새 기록</a:t>
+              <a:t>위험</a:t>
             </a:r>
             <a:r>
               <a:rPr sz="1200" b="0">
@@ -27688,7 +27482,70 @@
                 <a:latin typeface="맑은 고딕"/>
                 <a:ea typeface="맑은 고딕"/>
               </a:rPr>
-              <a:t> "배송 주기는 종류와 값 두 칼럼으로 저장한다"</a:t>
+              <a:t> 종류를 저장하지 않으면 매월 15일이 15일 간격이 된다.</a:t>
+            </a:r>
+          </a:p>
+          <a:p>
+            <a:pPr lvl="3" marL="457200" indent="-182880">
+              <a:spcBef>
+                <a:spcPts val="300"/>
+              </a:spcBef>
+              <a:spcAft>
+                <a:spcPts val="300"/>
+              </a:spcAft>
+              <a:buSzPct val="90000"/>
+              <a:buFont typeface="Wingdings" pitchFamily="2" charset="2"/>
+              <a:buChar char=""/>
+            </a:pPr>
+            <a:r>
+              <a:rPr sz="1200" b="1">
+                <a:solidFill>
+                  <a:srgbClr val="000000"/>
+                </a:solidFill>
+                <a:latin typeface="맑은 고딕"/>
+                <a:ea typeface="맑은 고딕"/>
+              </a:rPr>
+              <a:t>테스트</a:t>
+            </a:r>
+            <a:r>
+              <a:rPr sz="1200" b="0">
+                <a:solidFill>
+                  <a:srgbClr val="000000"/>
+                </a:solidFill>
+                <a:latin typeface="맑은 고딕"/>
+                <a:ea typeface="맑은 고딕"/>
+              </a:rPr>
+              <a:t> —</a:t>
+            </a:r>
+            <a:r>
+              <a:rPr sz="1000" b="0">
+                <a:solidFill>
+                  <a:srgbClr val="000000"/>
+                </a:solidFill>
+                <a:latin typeface="맑은 고딕"/>
+                <a:ea typeface="맑은 고딕"/>
+              </a:rPr>
+              <a:t> </a:t>
+            </a:r>
+            <a:r>
+              <a:rPr sz="1000" b="0">
+                <a:solidFill>
+                  <a:srgbClr val="000000"/>
+                </a:solidFill>
+                <a:latin typeface="맑은 고딕"/>
+                <a:ea typeface="맑은 고딕"/>
+              </a:rPr>
+              <a:t>MonthlyCycle(15)</a:t>
+            </a:r>
+            <a:r>
+              <a:rPr sz="1000" b="0">
+                <a:solidFill>
+                  <a:srgbClr val="000000"/>
+                </a:solidFill>
+                <a:latin typeface="맑은 고딕"/>
+                <a:ea typeface="맑은 고딕"/>
+              </a:rPr>
+              <a:t>로 저장·복원해 다음 배송일이 같은가</a:t>
             </a:r>
           </a:p>
           <a:p>
@@ -27711,7 +27568,7 @@
                 <a:latin typeface="맑은 고딕"/>
                 <a:ea typeface="맑은 고딕"/>
               </a:rPr>
-              <a:t>※ 현행화 기준</a:t>
+              <a:t>복원 규칙</a:t>
             </a:r>
           </a:p>
           <a:p>
@@ -27734,7 +27591,7 @@
                 <a:latin typeface="맑은 고딕"/>
                 <a:ea typeface="맑은 고딕"/>
               </a:rPr>
-              <a:t>반영</a:t>
+              <a:t>테스트</a:t>
             </a:r>
             <a:r>
               <a:rPr sz="1200" b="0">
@@ -27754,40 +27611,7 @@
                 <a:latin typeface="맑은 고딕"/>
                 <a:ea typeface="맑은 고딕"/>
               </a:rPr>
-              <a:t> 용어집, 복원 규칙, 결정 기록. 통합 설계의 입력이 된다.</a:t>
-            </a:r>
-          </a:p>
-          <a:p>
-            <a:pPr lvl="3" marL="457200" indent="-182880">
-              <a:spcBef>
-                <a:spcPts val="300"/>
-              </a:spcBef>
-              <a:spcAft>
-                <a:spcPts val="300"/>
-              </a:spcAft>
-              <a:buSzPct val="90000"/>
-              <a:buFont typeface="Wingdings" pitchFamily="2" charset="2"/>
-              <a:buChar char=""/>
-            </a:pPr>
-            <a:r>
-              <a:rPr sz="1200" b="1">
-                <a:solidFill>
-                  <a:srgbClr val="000000"/>
-                </a:solidFill>
-                <a:latin typeface="맑은 고딕"/>
-                <a:ea typeface="맑은 고딕"/>
-              </a:rPr>
-              <a:t>기록만</a:t>
-            </a:r>
-            <a:r>
-              <a:rPr sz="1200" b="0">
-                <a:solidFill>
-                  <a:srgbClr val="000000"/>
-                </a:solidFill>
-                <a:latin typeface="맑은 고딕"/>
-                <a:ea typeface="맑은 고딕"/>
-              </a:rPr>
-              <a:t> —</a:t>
+              <a:t> </a:t>
             </a:r>
             <a:r>
               <a:rPr sz="1000" b="0">
@@ -27797,7 +27621,37 @@
                 <a:latin typeface="맑은 고딕"/>
                 <a:ea typeface="맑은 고딕"/>
               </a:rPr>
-              <a:t> 도메인 모델의 배송 주기 설명.</a:t>
+              <a:t>cycle_value = 30</a:t>
+            </a:r>
+            <a:r>
+              <a:rPr sz="1000" b="0">
+                <a:solidFill>
+                  <a:srgbClr val="000000"/>
+                </a:solidFill>
+                <a:latin typeface="맑은 고딕"/>
+                <a:ea typeface="맑은 고딕"/>
+              </a:rPr>
+              <a:t>, </a:t>
+            </a:r>
+            <a:r>
+              <a:rPr sz="1000" b="0">
+                <a:solidFill>
+                  <a:srgbClr val="000000"/>
+                </a:solidFill>
+                <a:latin typeface="맑은 고딕"/>
+                <a:ea typeface="맑은 고딕"/>
+              </a:rPr>
+              <a:t>term_months = 0</a:t>
+            </a:r>
+            <a:r>
+              <a:rPr sz="1000" b="0">
+                <a:solidFill>
+                  <a:srgbClr val="000000"/>
+                </a:solidFill>
+                <a:latin typeface="맑은 고딕"/>
+                <a:ea typeface="맑은 고딕"/>
+              </a:rPr>
+              <a:t>인 행은 복원이 실패하는가</a:t>
             </a:r>
           </a:p>
         </p:txBody>
@@ -27867,7 +27721,29 @@
                 <a:latin typeface="맑은 고딕"/>
                 <a:ea typeface="맑은 고딕"/>
               </a:rPr>
-              <a:t>30. 요약</a:t>
+              <a:t>기술 제약 보완 </a:t>
+            </a:r>
+            <a:r>
+              <a:rPr sz="1800" b="1">
+                <a:solidFill>
+                  <a:srgbClr val="000000"/>
+                </a:solidFill>
+                <a:latin typeface="맑은 고딕"/>
+                <a:ea typeface="맑은 고딕"/>
+              </a:rPr>
+              <a:t>(안)</a:t>
+            </a:r>
+          </a:p>
+          <a:p>
+            <a:r>
+              <a:rPr sz="1100" b="1">
+                <a:solidFill>
+                  <a:srgbClr val="000000"/>
+                </a:solidFill>
+                <a:latin typeface="맑은 고딕"/>
+                <a:ea typeface="맑은 고딕"/>
+              </a:rPr>
+              <a:t>별첨. 실습 답</a:t>
             </a:r>
           </a:p>
         </p:txBody>
@@ -27930,7 +27806,7 @@
           <a:p>
             <a:r>
               <a:rPr kumimoji="1" lang="en-US" altLang="ko-KR" sz="1400" dirty="0" err="1"/>
-              <a:t>10. 기술 제약과 도메인 의미 보존</a:t>
+              <a:t>별첨: 10. 기술 제약과 도메인 의미 보존</a:t>
             </a:r>
           </a:p>
         </p:txBody>
@@ -28001,380 +27877,521 @@
             <p:ph idx="1"/>
           </p:nvPr>
         </p:nvSpPr>
-        <p:spPr/>
+        <p:spPr>
+          <a:xfrm>
+            <a:off x="233172" y="1414318"/>
+            <a:ext cx="4338828" cy="4898147"/>
+          </a:xfrm>
+        </p:spPr>
         <p:txBody>
           <a:bodyPr>
             <a:normAutofit/>
           </a:bodyPr>
           <a:lstStyle/>
           <a:p>
-            <a:pPr marL="0" indent="0">
+            <a:pPr lvl="2" marL="228600" indent="-182880">
               <a:spcBef>
-                <a:spcPts val="600"/>
+                <a:spcPts val="300"/>
               </a:spcBef>
               <a:spcAft>
-                <a:spcPts val="600"/>
-              </a:spcAft>
-              <a:buNone/>
-            </a:pPr>
-            <a:r>
-              <a:rPr sz="1800" b="0">
-                <a:solidFill>
-                  <a:srgbClr val="000000"/>
-                </a:solidFill>
-                <a:latin typeface="맑은 고딕"/>
-                <a:ea typeface="맑은 고딕"/>
-              </a:rPr>
-              <a:t>이 세션은 기술 제약에 적응하면서 도메인 </a:t>
-            </a:r>
-            <a:r>
-              <a:rPr sz="1800" b="1">
-                <a:solidFill>
-                  <a:srgbClr val="000000"/>
-                </a:solidFill>
-                <a:latin typeface="맑은 고딕"/>
-                <a:ea typeface="맑은 고딕"/>
-              </a:rPr>
-              <a:t>의미를 보존</a:t>
-            </a:r>
-            <a:r>
-              <a:rPr sz="1800" b="0">
-                <a:solidFill>
-                  <a:srgbClr val="000000"/>
-                </a:solidFill>
-                <a:latin typeface="맑은 고딕"/>
-                <a:ea typeface="맑은 고딕"/>
-              </a:rPr>
-              <a:t>하는 구조와 검증을 다뤘다.</a:t>
-            </a:r>
-          </a:p>
-          <a:p>
-            <a:pPr marL="342900" indent="0">
-              <a:spcBef>
-                <a:spcPts val="600"/>
-              </a:spcBef>
-              <a:spcAft>
-                <a:spcPts val="600"/>
-              </a:spcAft>
-              <a:buNone/>
-            </a:pPr>
-            <a:r>
-              <a:rPr sz="1800" b="1">
-                <a:solidFill>
-                  <a:srgbClr val="000000"/>
-                </a:solidFill>
-                <a:latin typeface="맑은 고딕"/>
-                <a:ea typeface="맑은 고딕"/>
-              </a:rPr>
-              <a:t>기술 제약과 도메인 의미 보존의 핵심</a:t>
-            </a:r>
-          </a:p>
-          <a:p>
-            <a:pPr lvl="2" marL="723900" indent="-368300">
-              <a:spcBef>
-                <a:spcPts val="600"/>
-              </a:spcBef>
-              <a:spcAft>
-                <a:spcPts val="600"/>
+                <a:spcPts val="300"/>
               </a:spcAft>
               <a:buSzPct val="90000"/>
               <a:buFont typeface="Wingdings" pitchFamily="2" charset="2"/>
               <a:buChar char=""/>
             </a:pPr>
             <a:r>
-              <a:rPr sz="1800" b="1">
-                <a:solidFill>
-                  <a:srgbClr val="000000"/>
-                </a:solidFill>
-                <a:latin typeface="맑은 고딕"/>
-                <a:ea typeface="맑은 고딕"/>
-              </a:rPr>
-              <a:t>원칙</a:t>
-            </a:r>
-            <a:r>
-              <a:rPr sz="1800" b="0">
-                <a:solidFill>
-                  <a:srgbClr val="000000"/>
-                </a:solidFill>
-                <a:latin typeface="맑은 고딕"/>
-                <a:ea typeface="맑은 고딕"/>
-              </a:rPr>
-              <a:t> —</a:t>
-            </a:r>
-            <a:r>
-              <a:rPr sz="1600" b="0">
-                <a:solidFill>
-                  <a:srgbClr val="000000"/>
-                </a:solidFill>
-                <a:latin typeface="맑은 고딕"/>
-                <a:ea typeface="맑은 고딕"/>
-              </a:rPr>
-              <a:t> 기술은 구조와 표현을 바꿀 수 있어도 의미를 조용히 바꾸지 않는다</a:t>
-            </a:r>
-          </a:p>
-          <a:p>
-            <a:pPr lvl="2" marL="723900" indent="-368300">
+              <a:rPr sz="1400" b="1">
+                <a:solidFill>
+                  <a:srgbClr val="000000"/>
+                </a:solidFill>
+                <a:latin typeface="맑은 고딕"/>
+                <a:ea typeface="맑은 고딕"/>
+              </a:rPr>
+              <a:t>용어집</a:t>
+            </a:r>
+            <a:r>
+              <a:rPr sz="1000" b="0">
+                <a:solidFill>
+                  <a:srgbClr val="000000"/>
+                </a:solidFill>
+                <a:latin typeface="맑은 고딕"/>
+                <a:ea typeface="맑은 고딕"/>
+              </a:rPr>
+              <a:t>(실습 2)</a:t>
+            </a:r>
+          </a:p>
+          <a:p>
+            <a:pPr lvl="3" marL="457200" indent="-182880">
               <a:spcBef>
-                <a:spcPts val="600"/>
+                <a:spcPts val="300"/>
               </a:spcBef>
               <a:spcAft>
-                <a:spcPts val="600"/>
+                <a:spcPts val="300"/>
+              </a:spcAft>
+              <a:buSzPct val="90000"/>
+              <a:buFont typeface="Wingdings" pitchFamily="2" charset="2"/>
+              <a:buChar char=""/>
+            </a:pPr>
+            <a:r>
+              <a:rPr sz="1200" b="1">
+                <a:solidFill>
+                  <a:srgbClr val="000000"/>
+                </a:solidFill>
+                <a:latin typeface="맑은 고딕"/>
+                <a:ea typeface="맑은 고딕"/>
+              </a:rPr>
+              <a:t>새 용어</a:t>
+            </a:r>
+            <a:r>
+              <a:rPr sz="1200" b="0">
+                <a:solidFill>
+                  <a:srgbClr val="000000"/>
+                </a:solidFill>
+                <a:latin typeface="맑은 고딕"/>
+                <a:ea typeface="맑은 고딕"/>
+              </a:rPr>
+              <a:t> —</a:t>
+            </a:r>
+            <a:r>
+              <a:rPr sz="1000" b="0">
+                <a:solidFill>
+                  <a:srgbClr val="000000"/>
+                </a:solidFill>
+                <a:latin typeface="맑은 고딕"/>
+                <a:ea typeface="맑은 고딕"/>
+              </a:rPr>
+              <a:t> 주기 종류 </a:t>
+            </a:r>
+            <a:r>
+              <a:rPr sz="1000" b="0">
+                <a:solidFill>
+                  <a:srgbClr val="000000"/>
+                </a:solidFill>
+                <a:latin typeface="맑은 고딕"/>
+                <a:ea typeface="맑은 고딕"/>
+              </a:rPr>
+              <a:t>CycleType</a:t>
+            </a:r>
+            <a:r>
+              <a:rPr sz="1000" b="0">
+                <a:solidFill>
+                  <a:srgbClr val="000000"/>
+                </a:solidFill>
+                <a:latin typeface="맑은 고딕"/>
+                <a:ea typeface="맑은 고딕"/>
+              </a:rPr>
+              <a:t>(</a:t>
+            </a:r>
+            <a:r>
+              <a:rPr sz="1000" b="0">
+                <a:solidFill>
+                  <a:srgbClr val="000000"/>
+                </a:solidFill>
+                <a:latin typeface="맑은 고딕"/>
+                <a:ea typeface="맑은 고딕"/>
+              </a:rPr>
+              <a:t>DAILY</a:t>
+            </a:r>
+            <a:r>
+              <a:rPr sz="1000" b="0">
+                <a:solidFill>
+                  <a:srgbClr val="000000"/>
+                </a:solidFill>
+                <a:latin typeface="맑은 고딕"/>
+                <a:ea typeface="맑은 고딕"/>
+              </a:rPr>
+              <a:t>, </a:t>
+            </a:r>
+            <a:r>
+              <a:rPr sz="1000" b="0">
+                <a:solidFill>
+                  <a:srgbClr val="000000"/>
+                </a:solidFill>
+                <a:latin typeface="맑은 고딕"/>
+                <a:ea typeface="맑은 고딕"/>
+              </a:rPr>
+              <a:t>MONTHLY</a:t>
+            </a:r>
+            <a:r>
+              <a:rPr sz="1000" b="0">
+                <a:solidFill>
+                  <a:srgbClr val="000000"/>
+                </a:solidFill>
+                <a:latin typeface="맑은 고딕"/>
+                <a:ea typeface="맑은 고딕"/>
+              </a:rPr>
+              <a:t>), 정기배송 행 </a:t>
+            </a:r>
+            <a:r>
+              <a:rPr sz="1000" b="0">
+                <a:solidFill>
+                  <a:srgbClr val="000000"/>
+                </a:solidFill>
+                <a:latin typeface="맑은 고딕"/>
+                <a:ea typeface="맑은 고딕"/>
+              </a:rPr>
+              <a:t>SubscriptionRow</a:t>
+            </a:r>
+          </a:p>
+          <a:p>
+            <a:pPr lvl="2" marL="228600" indent="-182880">
+              <a:spcBef>
+                <a:spcPts val="300"/>
+              </a:spcBef>
+              <a:spcAft>
+                <a:spcPts val="300"/>
               </a:spcAft>
               <a:buSzPct val="90000"/>
               <a:buFont typeface="Wingdings" pitchFamily="2" charset="2"/>
               <a:buChar char=""/>
             </a:pPr>
             <a:r>
-              <a:rPr sz="1800" b="1">
-                <a:solidFill>
-                  <a:srgbClr val="000000"/>
-                </a:solidFill>
-                <a:latin typeface="맑은 고딕"/>
-                <a:ea typeface="맑은 고딕"/>
-              </a:rPr>
-              <a:t>압력</a:t>
-            </a:r>
-            <a:r>
-              <a:rPr sz="1800" b="0">
-                <a:solidFill>
-                  <a:srgbClr val="000000"/>
-                </a:solidFill>
-                <a:latin typeface="맑은 고딕"/>
-                <a:ea typeface="맑은 고딕"/>
-              </a:rPr>
-              <a:t> —</a:t>
-            </a:r>
-            <a:r>
-              <a:rPr sz="1600" b="0">
-                <a:solidFill>
-                  <a:srgbClr val="000000"/>
-                </a:solidFill>
-                <a:latin typeface="맑은 고딕"/>
-                <a:ea typeface="맑은 고딕"/>
-              </a:rPr>
-              <a:t> 영속성</a:t>
-            </a:r>
-            <a:r>
-              <a:rPr sz="1200" b="0">
-                <a:solidFill>
-                  <a:srgbClr val="000000"/>
-                </a:solidFill>
-                <a:latin typeface="맑은 고딕"/>
-                <a:ea typeface="맑은 고딕"/>
-              </a:rPr>
-              <a:t>(표현 불일치)</a:t>
-            </a:r>
-            <a:r>
-              <a:rPr sz="1600" b="0">
-                <a:solidFill>
-                  <a:srgbClr val="000000"/>
-                </a:solidFill>
-                <a:latin typeface="맑은 고딕"/>
-                <a:ea typeface="맑은 고딕"/>
-              </a:rPr>
-              <a:t>, 프레임워크</a:t>
-            </a:r>
-            <a:r>
-              <a:rPr sz="1200" b="0">
-                <a:solidFill>
-                  <a:srgbClr val="000000"/>
-                </a:solidFill>
-                <a:latin typeface="맑은 고딕"/>
-                <a:ea typeface="맑은 고딕"/>
-              </a:rPr>
-              <a:t>(컨트롤러)</a:t>
-            </a:r>
-            <a:r>
-              <a:rPr sz="1600" b="0">
-                <a:solidFill>
-                  <a:srgbClr val="000000"/>
-                </a:solidFill>
-                <a:latin typeface="맑은 고딕"/>
-                <a:ea typeface="맑은 고딕"/>
-              </a:rPr>
-              <a:t>, 외부 API</a:t>
-            </a:r>
-            <a:r>
-              <a:rPr sz="1200" b="0">
-                <a:solidFill>
-                  <a:srgbClr val="000000"/>
-                </a:solidFill>
-                <a:latin typeface="맑은 고딕"/>
-                <a:ea typeface="맑은 고딕"/>
-              </a:rPr>
-              <a:t>(외부 모델)</a:t>
-            </a:r>
-          </a:p>
-          <a:p>
-            <a:pPr lvl="2" marL="723900" indent="-368300">
+              <a:rPr sz="1400" b="1">
+                <a:solidFill>
+                  <a:srgbClr val="000000"/>
+                </a:solidFill>
+                <a:latin typeface="맑은 고딕"/>
+                <a:ea typeface="맑은 고딕"/>
+              </a:rPr>
+              <a:t>설계 클래스 다이어그램</a:t>
+            </a:r>
+            <a:r>
+              <a:rPr sz="1000" b="0">
+                <a:solidFill>
+                  <a:srgbClr val="000000"/>
+                </a:solidFill>
+                <a:latin typeface="맑은 고딕"/>
+                <a:ea typeface="맑은 고딕"/>
+              </a:rPr>
+              <a:t>(실습 8)</a:t>
+            </a:r>
+          </a:p>
+          <a:p>
+            <a:pPr lvl="3" marL="457200" indent="-182880">
               <a:spcBef>
-                <a:spcPts val="600"/>
+                <a:spcPts val="300"/>
               </a:spcBef>
               <a:spcAft>
-                <a:spcPts val="600"/>
+                <a:spcPts val="300"/>
+              </a:spcAft>
+              <a:buSzPct val="90000"/>
+              <a:buFont typeface="Wingdings" pitchFamily="2" charset="2"/>
+              <a:buChar char=""/>
+            </a:pPr>
+            <a:r>
+              <a:rPr sz="1200" b="1">
+                <a:solidFill>
+                  <a:srgbClr val="000000"/>
+                </a:solidFill>
+                <a:latin typeface="맑은 고딕"/>
+                <a:ea typeface="맑은 고딕"/>
+              </a:rPr>
+              <a:t>복원</a:t>
+            </a:r>
+            <a:r>
+              <a:rPr sz="1200" b="0">
+                <a:solidFill>
+                  <a:srgbClr val="000000"/>
+                </a:solidFill>
+                <a:latin typeface="맑은 고딕"/>
+                <a:ea typeface="맑은 고딕"/>
+              </a:rPr>
+              <a:t> —</a:t>
+            </a:r>
+            <a:r>
+              <a:rPr sz="1000" b="0">
+                <a:solidFill>
+                  <a:srgbClr val="000000"/>
+                </a:solidFill>
+                <a:latin typeface="맑은 고딕"/>
+                <a:ea typeface="맑은 고딕"/>
+              </a:rPr>
+              <a:t> </a:t>
+            </a:r>
+            <a:r>
+              <a:rPr sz="1000" b="0">
+                <a:solidFill>
+                  <a:srgbClr val="000000"/>
+                </a:solidFill>
+                <a:latin typeface="맑은 고딕"/>
+                <a:ea typeface="맑은 고딕"/>
+              </a:rPr>
+              <a:t>Subscription.restore</a:t>
+            </a:r>
+            <a:r>
+              <a:rPr sz="1000" b="0">
+                <a:solidFill>
+                  <a:srgbClr val="000000"/>
+                </a:solidFill>
+                <a:latin typeface="맑은 고딕"/>
+                <a:ea typeface="맑은 고딕"/>
+              </a:rPr>
+              <a:t>, </a:t>
+            </a:r>
+            <a:r>
+              <a:rPr sz="1000" b="0">
+                <a:solidFill>
+                  <a:srgbClr val="000000"/>
+                </a:solidFill>
+                <a:latin typeface="맑은 고딕"/>
+                <a:ea typeface="맑은 고딕"/>
+              </a:rPr>
+              <a:t>DailyCycle</a:t>
+            </a:r>
+            <a:r>
+              <a:rPr sz="1000" b="0">
+                <a:solidFill>
+                  <a:srgbClr val="000000"/>
+                </a:solidFill>
+                <a:latin typeface="맑은 고딕"/>
+                <a:ea typeface="맑은 고딕"/>
+              </a:rPr>
+              <a:t>·</a:t>
+            </a:r>
+            <a:r>
+              <a:rPr sz="1000" b="0">
+                <a:solidFill>
+                  <a:srgbClr val="000000"/>
+                </a:solidFill>
+                <a:latin typeface="맑은 고딕"/>
+                <a:ea typeface="맑은 고딕"/>
+              </a:rPr>
+              <a:t>MonthlyCycle</a:t>
+            </a:r>
+            <a:r>
+              <a:rPr sz="1000" b="0">
+                <a:solidFill>
+                  <a:srgbClr val="000000"/>
+                </a:solidFill>
+                <a:latin typeface="맑은 고딕"/>
+                <a:ea typeface="맑은 고딕"/>
+              </a:rPr>
+              <a:t>의 생성 규칙을 복원에도 쓴다.</a:t>
+            </a:r>
+          </a:p>
+        </p:txBody>
+      </p:sp>
+      <p:sp>
+        <p:nvSpPr>
+          <p:cNvPr id="9" name="내용 개체 틀 7">
+            <a:extLst>
+              <a:ext uri="{FF2B5EF4-FFF2-40B4-BE49-F238E27FC236}">
+                <a16:creationId xmlns:a16="http://schemas.microsoft.com/office/drawing/2014/main" id="{BEBA2C4A-B0BF-F2E4-EA6E-614C99CBA184}"/>
+              </a:ext>
+            </a:extLst>
+          </p:cNvPr>
+          <p:cNvSpPr>
+            <a:spLocks noGrp="1"/>
+          </p:cNvSpPr>
+          <p:nvPr>
+            <p:ph idx="1"/>
+          </p:nvPr>
+        </p:nvSpPr>
+        <p:spPr>
+          <a:xfrm>
+            <a:off x="233172" y="960120"/>
+            <a:ext cx="8778240" cy="454198"/>
+          </a:xfrm>
+        </p:spPr>
+        <p:txBody>
+          <a:bodyPr>
+            <a:normAutofit/>
+          </a:bodyPr>
+          <a:lstStyle/>
+          <a:p>
+            <a:pPr marL="0" indent="0">
+              <a:spcBef>
+                <a:spcPts val="300"/>
+              </a:spcBef>
+              <a:spcAft>
+                <a:spcPts val="300"/>
+              </a:spcAft>
+              <a:buNone/>
+            </a:pPr>
+            <a:r>
+              <a:rPr sz="1400" b="0">
+                <a:solidFill>
+                  <a:srgbClr val="000000"/>
+                </a:solidFill>
+                <a:latin typeface="맑은 고딕"/>
+                <a:ea typeface="맑은 고딕"/>
+              </a:rPr>
+              <a:t>매핑을 설계하며 발견한 것은 </a:t>
+            </a:r>
+            <a:r>
+              <a:rPr sz="1400" b="1">
+                <a:solidFill>
+                  <a:srgbClr val="000000"/>
+                </a:solidFill>
+                <a:latin typeface="맑은 고딕"/>
+                <a:ea typeface="맑은 고딕"/>
+              </a:rPr>
+              <a:t>후속 작업에 영향을 미치는 경우에만</a:t>
+            </a:r>
+            <a:r>
+              <a:rPr sz="1400" b="0">
+                <a:solidFill>
+                  <a:srgbClr val="000000"/>
+                </a:solidFill>
+                <a:latin typeface="맑은 고딕"/>
+                <a:ea typeface="맑은 고딕"/>
+              </a:rPr>
+              <a:t> 이전 산출물에 반영한다.</a:t>
+            </a:r>
+          </a:p>
+        </p:txBody>
+      </p:sp>
+      <p:sp>
+        <p:nvSpPr>
+          <p:cNvPr id="10" name="내용 개체 틀 7">
+            <a:extLst>
+              <a:ext uri="{FF2B5EF4-FFF2-40B4-BE49-F238E27FC236}">
+                <a16:creationId xmlns:a16="http://schemas.microsoft.com/office/drawing/2014/main" id="{BEBA2C4A-B0BF-F2E4-EA6E-614C99CBA184}"/>
+              </a:ext>
+            </a:extLst>
+          </p:cNvPr>
+          <p:cNvSpPr>
+            <a:spLocks noGrp="1"/>
+          </p:cNvSpPr>
+          <p:nvPr>
+            <p:ph idx="1"/>
+          </p:nvPr>
+        </p:nvSpPr>
+        <p:spPr>
+          <a:xfrm>
+            <a:off x="4572000" y="1414318"/>
+            <a:ext cx="4439412" cy="4898147"/>
+          </a:xfrm>
+        </p:spPr>
+        <p:txBody>
+          <a:bodyPr>
+            <a:normAutofit/>
+          </a:bodyPr>
+          <a:lstStyle/>
+          <a:p>
+            <a:pPr lvl="2" marL="228600" indent="-182880">
+              <a:spcBef>
+                <a:spcPts val="300"/>
+              </a:spcBef>
+              <a:spcAft>
+                <a:spcPts val="300"/>
               </a:spcAft>
               <a:buSzPct val="90000"/>
               <a:buFont typeface="Wingdings" pitchFamily="2" charset="2"/>
               <a:buChar char=""/>
             </a:pPr>
             <a:r>
-              <a:rPr sz="1800" b="1">
-                <a:solidFill>
-                  <a:srgbClr val="000000"/>
-                </a:solidFill>
-                <a:latin typeface="맑은 고딕"/>
-                <a:ea typeface="맑은 고딕"/>
-              </a:rPr>
-              <a:t>4개의 모델</a:t>
-            </a:r>
-            <a:r>
-              <a:rPr sz="1800" b="0">
-                <a:solidFill>
-                  <a:srgbClr val="000000"/>
-                </a:solidFill>
-                <a:latin typeface="맑은 고딕"/>
-                <a:ea typeface="맑은 고딕"/>
-              </a:rPr>
-              <a:t> —</a:t>
-            </a:r>
-            <a:r>
-              <a:rPr sz="1600" b="0">
-                <a:solidFill>
-                  <a:srgbClr val="000000"/>
-                </a:solidFill>
-                <a:latin typeface="맑은 고딕"/>
-                <a:ea typeface="맑은 고딕"/>
-              </a:rPr>
-              <a:t> 도메인(</a:t>
-            </a:r>
-            <a:r>
-              <a:rPr sz="1600" b="0">
-                <a:solidFill>
-                  <a:srgbClr val="000000"/>
-                </a:solidFill>
-                <a:latin typeface="맑은 고딕"/>
-                <a:ea typeface="맑은 고딕"/>
-              </a:rPr>
-              <a:t>order</a:t>
-            </a:r>
-            <a:r>
-              <a:rPr sz="1600" b="0">
-                <a:solidFill>
-                  <a:srgbClr val="000000"/>
-                </a:solidFill>
-                <a:latin typeface="맑은 고딕"/>
-                <a:ea typeface="맑은 고딕"/>
-              </a:rPr>
-              <a:t>), 어댑터</a:t>
-            </a:r>
-            <a:r>
-              <a:rPr sz="1200" b="0">
-                <a:solidFill>
-                  <a:srgbClr val="000000"/>
-                </a:solidFill>
-                <a:latin typeface="맑은 고딕"/>
-                <a:ea typeface="맑은 고딕"/>
-              </a:rPr>
-              <a:t>(연동)</a:t>
-            </a:r>
-            <a:r>
-              <a:rPr sz="1600" b="0">
-                <a:solidFill>
-                  <a:srgbClr val="000000"/>
-                </a:solidFill>
-                <a:latin typeface="맑은 고딕"/>
-                <a:ea typeface="맑은 고딕"/>
-              </a:rPr>
-              <a:t>, 인프라·물리 모델(</a:t>
-            </a:r>
-            <a:r>
-              <a:rPr sz="1600" b="0">
-                <a:solidFill>
-                  <a:srgbClr val="000000"/>
-                </a:solidFill>
-                <a:latin typeface="맑은 고딕"/>
-                <a:ea typeface="맑은 고딕"/>
-              </a:rPr>
-              <a:t>persistence</a:t>
-            </a:r>
-            <a:r>
-              <a:rPr sz="1600" b="0">
-                <a:solidFill>
-                  <a:srgbClr val="000000"/>
-                </a:solidFill>
-                <a:latin typeface="맑은 고딕"/>
-                <a:ea typeface="맑은 고딕"/>
-              </a:rPr>
-              <a:t>). 도메인은 기술을 모른다</a:t>
-            </a:r>
-          </a:p>
-          <a:p>
-            <a:pPr lvl="2" marL="723900" indent="-368300">
+              <a:rPr sz="1400" b="1">
+                <a:solidFill>
+                  <a:srgbClr val="000000"/>
+                </a:solidFill>
+                <a:latin typeface="맑은 고딕"/>
+                <a:ea typeface="맑은 고딕"/>
+              </a:rPr>
+              <a:t>결정 기록</a:t>
+            </a:r>
+            <a:r>
+              <a:rPr sz="1000" b="0">
+                <a:solidFill>
+                  <a:srgbClr val="000000"/>
+                </a:solidFill>
+                <a:latin typeface="맑은 고딕"/>
+                <a:ea typeface="맑은 고딕"/>
+              </a:rPr>
+              <a:t>(실습 9)</a:t>
+            </a:r>
+          </a:p>
+          <a:p>
+            <a:pPr lvl="3" marL="457200" indent="-182880">
               <a:spcBef>
-                <a:spcPts val="600"/>
+                <a:spcPts val="300"/>
               </a:spcBef>
               <a:spcAft>
-                <a:spcPts val="600"/>
+                <a:spcPts val="300"/>
+              </a:spcAft>
+              <a:buSzPct val="90000"/>
+              <a:buFont typeface="Wingdings" pitchFamily="2" charset="2"/>
+              <a:buChar char=""/>
+            </a:pPr>
+            <a:r>
+              <a:rPr sz="1200" b="1">
+                <a:solidFill>
+                  <a:srgbClr val="000000"/>
+                </a:solidFill>
+                <a:latin typeface="맑은 고딕"/>
+                <a:ea typeface="맑은 고딕"/>
+              </a:rPr>
+              <a:t>새 기록</a:t>
+            </a:r>
+            <a:r>
+              <a:rPr sz="1200" b="0">
+                <a:solidFill>
+                  <a:srgbClr val="000000"/>
+                </a:solidFill>
+                <a:latin typeface="맑은 고딕"/>
+                <a:ea typeface="맑은 고딕"/>
+              </a:rPr>
+              <a:t> —</a:t>
+            </a:r>
+            <a:r>
+              <a:rPr sz="1000" b="0">
+                <a:solidFill>
+                  <a:srgbClr val="000000"/>
+                </a:solidFill>
+                <a:latin typeface="맑은 고딕"/>
+                <a:ea typeface="맑은 고딕"/>
+              </a:rPr>
+              <a:t> "배송 주기는 종류와 값 두 칼럼으로 저장한다"</a:t>
+            </a:r>
+          </a:p>
+          <a:p>
+            <a:pPr lvl="2" marL="228600" indent="-182880">
+              <a:spcBef>
+                <a:spcPts val="300"/>
+              </a:spcBef>
+              <a:spcAft>
+                <a:spcPts val="300"/>
               </a:spcAft>
               <a:buSzPct val="90000"/>
               <a:buFont typeface="Wingdings" pitchFamily="2" charset="2"/>
               <a:buChar char=""/>
             </a:pPr>
             <a:r>
-              <a:rPr sz="1800" b="1">
-                <a:solidFill>
-                  <a:srgbClr val="000000"/>
-                </a:solidFill>
-                <a:latin typeface="맑은 고딕"/>
-                <a:ea typeface="맑은 고딕"/>
-              </a:rPr>
-              <a:t>매핑</a:t>
-            </a:r>
-            <a:r>
-              <a:rPr sz="1800" b="0">
-                <a:solidFill>
-                  <a:srgbClr val="000000"/>
-                </a:solidFill>
-                <a:latin typeface="맑은 고딕"/>
-                <a:ea typeface="맑은 고딕"/>
-              </a:rPr>
-              <a:t> —</a:t>
-            </a:r>
-            <a:r>
-              <a:rPr sz="1600" b="0">
-                <a:solidFill>
-                  <a:srgbClr val="000000"/>
-                </a:solidFill>
-                <a:latin typeface="맑은 고딕"/>
-                <a:ea typeface="맑은 고딕"/>
-              </a:rPr>
-              <a:t> 상태는 이름, 확정 값은 그대로, 파생 값은 저장하지 않는다, 복원은 규칙을 다시 검사</a:t>
-            </a:r>
-          </a:p>
-          <a:p>
-            <a:pPr lvl="2" marL="723900" indent="-368300">
+              <a:rPr sz="1400" b="1">
+                <a:solidFill>
+                  <a:srgbClr val="000000"/>
+                </a:solidFill>
+                <a:latin typeface="맑은 고딕"/>
+                <a:ea typeface="맑은 고딕"/>
+              </a:rPr>
+              <a:t>※ 현행화 기준</a:t>
+            </a:r>
+          </a:p>
+          <a:p>
+            <a:pPr lvl="3" marL="457200" indent="-182880">
               <a:spcBef>
-                <a:spcPts val="600"/>
+                <a:spcPts val="300"/>
               </a:spcBef>
               <a:spcAft>
-                <a:spcPts val="600"/>
+                <a:spcPts val="300"/>
               </a:spcAft>
               <a:buSzPct val="90000"/>
               <a:buFont typeface="Wingdings" pitchFamily="2" charset="2"/>
-              <a:buChar char=""/>
+              <a:buChar char=""/>
             </a:pPr>
             <a:r>
-              <a:rPr sz="1800" b="1">
-                <a:solidFill>
-                  <a:srgbClr val="000000"/>
-                </a:solidFill>
-                <a:latin typeface="맑은 고딕"/>
-                <a:ea typeface="맑은 고딕"/>
-              </a:rPr>
-              <a:t>검증</a:t>
-            </a:r>
-            <a:r>
-              <a:rPr sz="1800" b="0">
+              <a:rPr sz="1200" b="1">
+                <a:solidFill>
+                  <a:srgbClr val="000000"/>
+                </a:solidFill>
+                <a:latin typeface="맑은 고딕"/>
+                <a:ea typeface="맑은 고딕"/>
+              </a:rPr>
+              <a:t>반영</a:t>
+            </a:r>
+            <a:r>
+              <a:rPr sz="1200" b="0">
                 <a:solidFill>
                   <a:srgbClr val="000000"/>
                 </a:solidFill>
@@ -28384,40 +28401,40 @@
               <a:t> —</a:t>
             </a:r>
             <a:r>
-              <a:rPr sz="1600" b="0">
-                <a:solidFill>
-                  <a:srgbClr val="000000"/>
-                </a:solidFill>
-                <a:latin typeface="맑은 고딕"/>
-                <a:ea typeface="맑은 고딕"/>
-              </a:rPr>
-              <a:t> 라운드트립 테스트로 저장·복원·변환의 의미를 확인한다</a:t>
-            </a:r>
-          </a:p>
-          <a:p>
-            <a:pPr lvl="2" marL="723900" indent="-368300">
+              <a:rPr sz="1000" b="0">
+                <a:solidFill>
+                  <a:srgbClr val="000000"/>
+                </a:solidFill>
+                <a:latin typeface="맑은 고딕"/>
+                <a:ea typeface="맑은 고딕"/>
+              </a:rPr>
+              <a:t> 용어집, 복원 규칙, 결정 기록. 통합 설계의 입력이 된다.</a:t>
+            </a:r>
+          </a:p>
+          <a:p>
+            <a:pPr lvl="3" marL="457200" indent="-182880">
               <a:spcBef>
-                <a:spcPts val="600"/>
+                <a:spcPts val="300"/>
               </a:spcBef>
               <a:spcAft>
-                <a:spcPts val="600"/>
+                <a:spcPts val="300"/>
               </a:spcAft>
               <a:buSzPct val="90000"/>
               <a:buFont typeface="Wingdings" pitchFamily="2" charset="2"/>
-              <a:buChar char=""/>
+              <a:buChar char=""/>
             </a:pPr>
             <a:r>
-              <a:rPr sz="1800" b="1">
-                <a:solidFill>
-                  <a:srgbClr val="000000"/>
-                </a:solidFill>
-                <a:latin typeface="맑은 고딕"/>
-                <a:ea typeface="맑은 고딕"/>
-              </a:rPr>
-              <a:t>잘못된 관행</a:t>
-            </a:r>
-            <a:r>
-              <a:rPr sz="1800" b="0">
+              <a:rPr sz="1200" b="1">
+                <a:solidFill>
+                  <a:srgbClr val="000000"/>
+                </a:solidFill>
+                <a:latin typeface="맑은 고딕"/>
+                <a:ea typeface="맑은 고딕"/>
+              </a:rPr>
+              <a:t>기록만</a:t>
+            </a:r>
+            <a:r>
+              <a:rPr sz="1200" b="0">
                 <a:solidFill>
                   <a:srgbClr val="000000"/>
                 </a:solidFill>
@@ -28427,88 +28444,14 @@
               <a:t> —</a:t>
             </a:r>
             <a:r>
-              <a:rPr sz="1600" b="0">
-                <a:solidFill>
-                  <a:srgbClr val="000000"/>
-                </a:solidFill>
-                <a:latin typeface="맑은 고딕"/>
-                <a:ea typeface="맑은 고딕"/>
-              </a:rPr>
-              <a:t> 테이블이 모델, 외부 모델 닮기, 프레임워크 규칙, 조용한 기본값</a:t>
-            </a:r>
-          </a:p>
-          <a:p>
-            <a:pPr marL="342900" indent="0">
-              <a:spcBef>
-                <a:spcPts val="600"/>
-              </a:spcBef>
-              <a:spcAft>
-                <a:spcPts val="600"/>
-              </a:spcAft>
-              <a:buNone/>
-            </a:pPr>
-            <a:r>
-              <a:rPr sz="1800" b="1">
-                <a:solidFill>
-                  <a:srgbClr val="000000"/>
-                </a:solidFill>
-                <a:latin typeface="맑은 고딕"/>
-                <a:ea typeface="맑은 고딕"/>
-              </a:rPr>
-              <a:t>다음 세션</a:t>
-            </a:r>
-          </a:p>
-          <a:p>
-            <a:pPr lvl="2" marL="723900" indent="-368300">
-              <a:spcBef>
-                <a:spcPts val="600"/>
-              </a:spcBef>
-              <a:spcAft>
-                <a:spcPts val="600"/>
-              </a:spcAft>
-              <a:buSzPct val="90000"/>
-              <a:buFont typeface="Wingdings" pitchFamily="2" charset="2"/>
-              <a:buChar char=""/>
-            </a:pPr>
-            <a:r>
-              <a:rPr sz="1800" b="0">
-                <a:solidFill>
-                  <a:srgbClr val="000000"/>
-                </a:solidFill>
-                <a:latin typeface="맑은 고딕"/>
-                <a:ea typeface="맑은 고딕"/>
-              </a:rPr>
-              <a:t>"</a:t>
-            </a:r>
-            <a:r>
-              <a:rPr sz="1800" b="1">
-                <a:solidFill>
-                  <a:srgbClr val="000000"/>
-                </a:solidFill>
-                <a:latin typeface="맑은 고딕"/>
-                <a:ea typeface="맑은 고딕"/>
-              </a:rPr>
-              <a:t>11. 통합 설계와 적정 모델링</a:t>
-            </a:r>
-            <a:r>
-              <a:rPr sz="1800" b="0">
-                <a:solidFill>
-                  <a:srgbClr val="000000"/>
-                </a:solidFill>
-                <a:latin typeface="맑은 고딕"/>
-                <a:ea typeface="맑은 고딕"/>
-              </a:rPr>
-              <a:t>" —</a:t>
-            </a:r>
-            <a:r>
-              <a:rPr sz="1600" b="0">
-                <a:solidFill>
-                  <a:srgbClr val="000000"/>
-                </a:solidFill>
-                <a:latin typeface="맑은 고딕"/>
-                <a:ea typeface="맑은 고딕"/>
-              </a:rPr>
-              <a:t> 요구부터 기술 실현까지의 판단을 하나의 사례로 통합하고, 추가 모델링의 가치와 비용을 판단한다.</a:t>
+              <a:rPr sz="1000" b="0">
+                <a:solidFill>
+                  <a:srgbClr val="000000"/>
+                </a:solidFill>
+                <a:latin typeface="맑은 고딕"/>
+                <a:ea typeface="맑은 고딕"/>
+              </a:rPr>
+              <a:t> 도메인 모델의 배송 주기 설명.</a:t>
             </a:r>
           </a:p>
         </p:txBody>

--- a/courses/ooad/sessions/s10.pptx
+++ b/courses/ooad/sessions/s10.pptx
@@ -568,7 +568,7 @@
             <a:pPr lvl="0"/>
             <a:r>
               <a:rPr lang="ko-KR" sz="1200"/>
-              <a:t>물리 모델은 "03. 정적 모델 — 도메인 개념과 관계"의 데이터 모델(ERD)과 다르다. ERD는 업무 개념을, 물리 모델은 저장 기술의 모양을 나타낸다.</a:t>
+              <a:t>물리 모델은 "세션 03. 정적 모델 — 도메인 개념과 관계"의 데이터 모델(ERD)과 다르다. ERD는 업무 개념을, 물리 모델은 저장 기술의 모양을 나타낸다.</a:t>
             </a:r>
           </a:p>
           <a:p>
@@ -643,7 +643,7 @@
             <a:pPr lvl="0"/>
             <a:r>
               <a:rPr lang="ko-KR" sz="1200"/>
-              <a:t>매퍼는 GRASP의 순수 가공이다("08. 변화 대응과 변이 설계"의 「12. GRASP 변화 대응」). Larman도 데이터베이스 매퍼를 순수 가공으로 설명한다(3rd ed., §38.5).</a:t>
+              <a:t>매퍼는 GRASP의 순수 가공이다("세션 08. 변화 대응과 변이 설계"의 「12. GRASP 변화 대응」). Larman도 데이터베이스 매퍼를 순수 가공으로 설명한다(3rd ed., §38.5).</a:t>
             </a:r>
           </a:p>
         </p:txBody>
@@ -772,14 +772,14 @@
             <a:pPr lvl="0"/>
             <a:r>
               <a:rPr lang="ko-KR" sz="1200"/>
-              <a:t>다섯 손실은 앞 세션들이 지켜 온 의미를 어긴다 — 상태 값("04. 동적 모델 — 상호작용과 상태"), 단가("03. 정적 모델 — 도메인 개념과 관계"), 불변 조건("07. 책임·협력·계약").</a:t>
+              <a:t>다섯 손실은 앞 세션들이 지켜 온 의미를 어긴다 — 상태 값("세션 04. 동적 모델 — 상호작용과 상태"), 단가("세션 03. 정적 모델 — 도메인 개념과 관계"), 불변 조건("세션 07. 책임·협력·계약").</a:t>
             </a:r>
           </a:p>
           <a:p>
             <a:pPr lvl="0"/>
             <a:r>
               <a:rPr lang="ko-KR" sz="1200"/>
-              <a:t>"06. 분석 모델에서 설계 모델로"의 「17. 조용한 의미 변경」이 설계의 편의에서 오는 손실이었다면, 이 표는 기술의 편의에서 오는 손실이다.</a:t>
+              <a:t>"세션 06. 분석 모델에서 설계 모델로"의 「17. 조용한 의미 변경」이 설계의 편의에서 오는 손실이었다면, 이 표는 기술의 편의에서 오는 손실이다.</a:t>
             </a:r>
           </a:p>
         </p:txBody>
@@ -908,7 +908,7 @@
             <a:pPr lvl="0"/>
             <a:r>
               <a:rPr lang="ko-KR" sz="1200"/>
-              <a:t>단가와 판매가의 구분은 "02. 요구 분석과 유스케이스"의 용어집에서 정의하고 "03. 정적 모델 — 도메인 개념과 관계"의 「11. 개념의 분리」의 「현재 값과 확정 값」에서 모델로 확인했다. 저장은 그 의미를 지키는 마지막 자리다.</a:t>
+              <a:t>단가와 판매가의 구분은 "세션 02. 요구 분석과 유스케이스"의 용어집에서 정의하고 "세션 03. 정적 모델 — 도메인 개념과 관계"의 「11. 개념의 분리」의 「현재 값과 확정 값」에서 모델로 확인했다. 저장은 그 의미를 지키는 마지막 자리다.</a:t>
             </a:r>
           </a:p>
           <a:p>
@@ -1051,7 +1051,7 @@
             <a:pPr lvl="0"/>
             <a:r>
               <a:rPr lang="ko-KR" sz="1200"/>
-              <a:t>반부패 계층(Anticorruption Layer)의 본격 논의 — 경계 컨텍스트 사이의 관계 — 는 "13. OOAD에서 전문영역으로 — Architecture · DDD · MSA"에서 한다.</a:t>
+              <a:t>반부패 계층(Anticorruption Layer)의 본격 논의 — 경계 컨텍스트 사이의 관계 — 는 "세션 13. OOAD에서 전문영역으로 — Architecture · DDD · MSA"에서 한다.</a:t>
             </a:r>
           </a:p>
         </p:txBody>
@@ -1112,7 +1112,7 @@
             <a:pPr lvl="0"/>
             <a:r>
               <a:rPr lang="ko-KR" sz="1200"/>
-              <a:t>모르는 코드를 조용히 무시하면 사건을 잃는다. 이 예제의 연동은 무시하지만(범위 밖), 실제로는 기록하고 알린다 — "12. 구현·검증·DevOps와 SW공학 피드백".</a:t>
+              <a:t>모르는 코드를 조용히 무시하면 사건을 잃는다. 이 예제의 연동은 무시하지만(범위 밖), 실제로는 기록하고 알린다 — "세션 12. 구현·검증·DevOps와 SW공학 피드백".</a:t>
             </a:r>
           </a:p>
         </p:txBody>
@@ -1241,7 +1241,7 @@
             <a:pPr lvl="0"/>
             <a:r>
               <a:rPr lang="ko-KR" sz="1200"/>
-              <a:t>입력은 "09. 설계 대안 평가"까지의 설계와 결정 기록이다. 기술 선택(어느 데이터베이스·프레임워크)은 이 세션의 대상이 아니다. 어느 기술이든 의미를 지키는 구조와 검증을 다룬다.</a:t>
+              <a:t>입력은 "세션 09. 설계 대안 평가"까지의 설계와 결정 기록이다. 기술 선택(어느 데이터베이스·프레임워크)은 이 세션의 대상이 아니다. 어느 기술이든 의미를 지키는 구조와 검증을 다룬다.</a:t>
             </a:r>
           </a:p>
           <a:p>
@@ -1316,7 +1316,7 @@
             <a:pPr lvl="0"/>
             <a:r>
               <a:rPr lang="ko-KR" sz="1200"/>
-              <a:t>매퍼가 Order의 읽기 메서드(items(), shippingAddress())를 쓴다. 읽기 메서드는 판단을 밖으로 내보내지 않는 선에서만 연다("07. 책임·협력·계약"의 묻기와 시키기).</a:t>
+              <a:t>매퍼가 Order의 읽기 메서드(items(), shippingAddress())를 쓴다. 읽기 메서드는 판단을 밖으로 내보내지 않는 선에서만 연다("세션 07. 책임·협력·계약"의 묻기와 시키기).</a:t>
             </a:r>
           </a:p>
         </p:txBody>
@@ -1398,7 +1398,7 @@
             <a:pPr lvl="0"/>
             <a:r>
               <a:rPr lang="ko-KR" sz="1200"/>
-              <a:t>이 기대값은 "06. 분석 모델에서 설계 모델로"의 「18. 보존의 검증」과 같다. 기술 계층을 지나도 기대값이 같다는 것이 의미 보존의 증거다. 실제 데이터베이스로 하는 통합 테스트는 "12. 구현·검증·DevOps와 SW공학 피드백"에서 다룬다.</a:t>
+              <a:t>이 기대값은 "세션 06. 분석 모델에서 설계 모델로"의 「18. 보존의 검증」과 같다. 기술 계층을 지나도 기대값이 같다는 것이 의미 보존의 증거다. 실제 데이터베이스로 하는 통합 테스트는 "세션 12. 구현·검증·DevOps와 SW공학 피드백"에서 다룬다.</a:t>
             </a:r>
           </a:p>
         </p:txBody>
@@ -1466,7 +1466,7 @@
             <a:pPr lvl="0"/>
             <a:r>
               <a:rPr lang="ko-KR" sz="1200"/>
-              <a:t>데이터 모델에서 출발하는 것은 잘못이 아니다. 잘못은 저장의 모양이 도메인의 모양을 정하는 것이다("06. 분석 모델에서 설계 모델로"의 기술 먼저).</a:t>
+              <a:t>데이터 모델에서 출발하는 것은 잘못이 아니다. 잘못은 저장의 모양이 도메인의 모양을 정하는 것이다("세션 06. 분석 모델에서 설계 모델로"의 기술 먼저).</a:t>
             </a:r>
           </a:p>
         </p:txBody>
@@ -1534,7 +1534,7 @@
             <a:pPr lvl="0"/>
             <a:r>
               <a:rPr lang="ko-KR" sz="1200"/>
-              <a:t>"05. 구조적 경계와 의존성"의 「18. 잘못된 관행」의 「외부 모델 누수」를 모델 수준에서 본 것이다. 누수가 쌓이면 닮음이 된다.</a:t>
+              <a:t>"세션 05. 구조적 경계와 의존성"의 「18. 잘못된 관행」의 「외부 모델 누수」를 모델 수준에서 본 것이다. 누수가 쌓이면 닮음이 된다.</a:t>
             </a:r>
           </a:p>
         </p:txBody>
@@ -1602,7 +1602,7 @@
             <a:pPr lvl="0"/>
             <a:r>
               <a:rPr lang="ko-KR" sz="1200"/>
-              <a:t>프레임워크가 도메인에 직접 붙는 방식이 팀의 결정이라면, 대안 평가("09. 설계 대안 평가")와 결정 기록을 남기고 불변 조건을 지킬 다른 수단(검증 계층, 테스트)을 명시한다.</a:t>
+              <a:t>프레임워크가 도메인에 직접 붙는 방식이 팀의 결정이라면, 대안 평가("세션 09. 설계 대안 평가")와 결정 기록을 남기고 불변 조건을 지킬 다른 수단(검증 계층, 테스트)을 명시한다.</a:t>
             </a:r>
           </a:p>
         </p:txBody>
@@ -1663,7 +1663,7 @@
             <a:pPr lvl="0"/>
             <a:r>
               <a:rPr lang="ko-KR" sz="1200"/>
-              <a:t>"07. 책임·협력·계약"의 「42. 잘못된 관행 — 계약 없는 방어」에서 본 "조용히 무시하기"의 데이터 판이다.</a:t>
+              <a:t>"세션 07. 책임·협력·계약"의 「42. 잘못된 관행 — 계약 없는 방어」에서 본 "조용히 무시하기"의 데이터 판이다.</a:t>
             </a:r>
           </a:p>
           <a:p>
@@ -1731,14 +1731,14 @@
             <a:pPr lvl="0"/>
             <a:r>
               <a:rPr lang="ko-KR" sz="1200"/>
-              <a:t>분리의 비용은 매퍼 코드와 이중 모델이다. "09. 설계 대안 평가"의 흐름으로 비용과 얻는 것을 비교한다.</a:t>
+              <a:t>분리의 비용은 매퍼 코드와 이중 모델이다. "세션 09. 설계 대안 평가"의 흐름으로 비용과 얻는 것을 비교한다.</a:t>
             </a:r>
           </a:p>
           <a:p>
             <a:pPr lvl="0"/>
             <a:r>
               <a:rPr lang="ko-KR" sz="1200"/>
-              <a:t>적정 모델링 전체의 판단은 "11. 통합 설계와 적정 모델링"에서 다룬다.</a:t>
+              <a:t>적정 모델링 전체의 판단은 "세션 11. 통합 설계와 적정 모델링"에서 다룬다.</a:t>
             </a:r>
           </a:p>
         </p:txBody>
@@ -1996,14 +1996,14 @@
             <a:pPr lvl="0"/>
             <a:r>
               <a:rPr lang="ko-KR" sz="1200"/>
-              <a:t>오른쪽 열의 셋은 "06. 분석 모델에서 설계 모델로"의 의미 보존 기준 중 다중성·값·용어에 해당한다. 이 세션은 그 기준을 기술 수준에 다시 적용한다.</a:t>
+              <a:t>오른쪽 열의 셋은 "세션 06. 분석 모델에서 설계 모델로"의 의미 보존 기준 중 다중성·값·용어에 해당한다. 이 세션은 그 기준을 기술 수준에 다시 적용한다.</a:t>
             </a:r>
           </a:p>
           <a:p>
             <a:pPr lvl="0"/>
             <a:r>
               <a:rPr lang="ko-KR" sz="1200"/>
-              <a:t>저장소 약속 OrderRepository는 "06. 분석 모델에서 설계 모델로"에서 만들었다. 이 세션은 그 약속을 실현한다.</a:t>
+              <a:t>저장소 약속 OrderRepository는 "세션 06. 분석 모델에서 설계 모델로"에서 만들었다. 이 세션은 그 약속을 실현한다.</a:t>
             </a:r>
           </a:p>
         </p:txBody>
@@ -2275,7 +2275,7 @@
             <a:pPr lvl="0"/>
             <a:r>
               <a:rPr lang="ko-KR" sz="1200"/>
-              <a:t>데이터 모델링은 좋은 출발점이지만("03. 정적 모델 — 도메인 개념과 관계"), 저장 형식이 도메인의 형태를 정하게 두지 않는다.</a:t>
+              <a:t>데이터 모델링은 좋은 출발점이지만("세션 03. 정적 모델 — 도메인 개념과 관계"), 저장 형식이 도메인의 형태를 정하게 두지 않는다.</a:t>
             </a:r>
           </a:p>
         </p:txBody>
@@ -2404,7 +2404,7 @@
             <a:pPr lvl="0"/>
             <a:r>
               <a:rPr lang="ko-KR" sz="1200"/>
-              <a:t>대행사가 둘인 배송("08. 변화 대응과 변이 설계")처럼, 같은 의미를 외부마다 다르게 받는다.</a:t>
+              <a:t>대행사가 둘인 배송("세션 08. 변화 대응과 변이 설계")처럼, 같은 의미를 외부마다 다르게 받는다.</a:t>
             </a:r>
           </a:p>
           <a:p>
@@ -2479,7 +2479,7 @@
             <a:pPr lvl="0"/>
             <a:r>
               <a:rPr lang="ko-KR" sz="1200"/>
-              <a:t>이 방향은 "05. 구조적 경계와 의존성"에서 정한 의존 역전(업무 경계가 약속을 소유)과 같다. 저장 기술도 연동과 같은 방식으로 붙는다.</a:t>
+              <a:t>이 방향은 "세션 05. 구조적 경계와 의존성"에서 정한 의존 역전(업무 경계가 약속을 소유)과 같다. 저장 기술도 연동과 같은 방식으로 붙는다.</a:t>
             </a:r>
           </a:p>
         </p:txBody>
@@ -2540,14 +2540,14 @@
             <a:pPr lvl="0"/>
             <a:r>
               <a:rPr lang="ko-KR" sz="1200"/>
-              <a:t>물리 모델을 별도 패키지로 나눌 수도 있다. 이 예제는 물리 모델을 쓰는 곳이 매퍼 하나라 함께 두었다 — 함께 쓰이는 것은 함께 둔다("05. 구조적 경계와 의존성"의 CRP).</a:t>
+              <a:t>물리 모델을 별도 패키지로 나눌 수도 있다. 이 예제는 물리 모델을 쓰는 곳이 매퍼 하나라 함께 두었다 — 함께 쓰이는 것은 함께 둔다("세션 05. 구조적 경계와 의존성"의 CRP).</a:t>
             </a:r>
           </a:p>
           <a:p>
             <a:pPr lvl="0"/>
             <a:r>
               <a:rPr lang="ko-KR" sz="1200"/>
-              <a:t>이 구조를 포트와 어댑터(육각형 아키텍처) 등으로 부른다. 아키텍처 스타일의 이름과 비교는 "13. OOAD에서 전문영역으로 — Architecture · DDD · MSA"에서 한다.</a:t>
+              <a:t>이 구조를 포트와 어댑터(육각형 아키텍처) 등으로 부른다. 아키텍처 스타일의 이름과 비교는 "세션 13. OOAD에서 전문영역으로 — Architecture · DDD · MSA"에서 한다.</a:t>
             </a:r>
           </a:p>
         </p:txBody>
@@ -4697,7 +4697,7 @@
           </p:nvPr>
         </p:nvGraphicFramePr>
         <p:xfrm>
-          <a:off x="1357186" y="4705596"/>
+          <a:off x="1357186" y="4837723"/>
           <a:ext cx="6416040" cy="3873500"/>
         </p:xfrm>
         <a:graphic>
@@ -5931,7 +5931,7 @@
         </p:blipFill>
         <p:spPr>
           <a:xfrm>
-            <a:off x="2557629" y="2357073"/>
+            <a:off x="2557629" y="2362200"/>
             <a:ext cx="4015154" cy="2246923"/>
           </a:xfrm>
           <a:prstGeom prst="rect">
@@ -6108,7 +6108,7 @@
           </p:nvPr>
         </p:nvGraphicFramePr>
         <p:xfrm>
-          <a:off x="964756" y="3058085"/>
+          <a:off x="964756" y="2874818"/>
           <a:ext cx="7200900" cy="3873500"/>
         </p:xfrm>
         <a:graphic>
@@ -6679,7 +6679,7 @@
         <p:spPr>
           <a:xfrm>
             <a:off x="365760" y="960120"/>
-            <a:ext cx="8412480" cy="1996365"/>
+            <a:ext cx="8412480" cy="1844479"/>
           </a:xfrm>
           <a:prstGeom prst="rect">
             <a:avLst/>
@@ -7161,7 +7161,7 @@
           </p:nvPr>
         </p:nvGraphicFramePr>
         <p:xfrm>
-          <a:off x="532956" y="2100036"/>
+          <a:off x="532956" y="2087880"/>
           <a:ext cx="8064500" cy="3873500"/>
         </p:xfrm>
         <a:graphic>
@@ -9190,7 +9190,7 @@
           </p:nvPr>
         </p:nvGraphicFramePr>
         <p:xfrm>
-          <a:off x="1340675" y="2100036"/>
+          <a:off x="1340675" y="2087880"/>
           <a:ext cx="6449060" cy="3873500"/>
         </p:xfrm>
         <a:graphic>
@@ -10068,7 +10068,7 @@
         </p:nvSpPr>
         <p:spPr>
           <a:xfrm>
-            <a:off x="365760" y="3929636"/>
+            <a:off x="365760" y="4044480"/>
             <a:ext cx="8412480" cy="524240"/>
           </a:xfrm>
           <a:prstGeom prst="rect">
@@ -10295,7 +10295,7 @@
           </p:nvPr>
         </p:nvGraphicFramePr>
         <p:xfrm>
-          <a:off x="1133666" y="2100036"/>
+          <a:off x="1133666" y="2087880"/>
           <a:ext cx="6863080" cy="3873500"/>
         </p:xfrm>
         <a:graphic>
@@ -11447,7 +11447,7 @@
         </p:nvSpPr>
         <p:spPr>
           <a:xfrm>
-            <a:off x="365760" y="3353636"/>
+            <a:off x="365760" y="3468480"/>
             <a:ext cx="8412480" cy="781278"/>
           </a:xfrm>
           <a:prstGeom prst="rect">
@@ -11704,7 +11704,7 @@
           </p:nvPr>
         </p:nvGraphicFramePr>
         <p:xfrm>
-          <a:off x="1314006" y="1842998"/>
+          <a:off x="1314006" y="1813560"/>
           <a:ext cx="6502400" cy="3873500"/>
         </p:xfrm>
         <a:graphic>
@@ -12607,7 +12607,7 @@
         </p:nvSpPr>
         <p:spPr>
           <a:xfrm>
-            <a:off x="365760" y="3096598"/>
+            <a:off x="365760" y="3194160"/>
             <a:ext cx="8412480" cy="781278"/>
           </a:xfrm>
           <a:prstGeom prst="rect">
@@ -12834,7 +12834,7 @@
           </p:nvPr>
         </p:nvGraphicFramePr>
         <p:xfrm>
-          <a:off x="1579436" y="1842998"/>
+          <a:off x="1579436" y="1813560"/>
           <a:ext cx="5971540" cy="3873500"/>
         </p:xfrm>
         <a:graphic>
@@ -13539,7 +13539,7 @@
         </p:nvSpPr>
         <p:spPr>
           <a:xfrm>
-            <a:off x="365760" y="2808598"/>
+            <a:off x="365760" y="2906160"/>
             <a:ext cx="8412480" cy="781278"/>
           </a:xfrm>
           <a:prstGeom prst="rect">
@@ -13766,7 +13766,7 @@
           </p:nvPr>
         </p:nvGraphicFramePr>
         <p:xfrm>
-          <a:off x="1341945" y="3058085"/>
+          <a:off x="1341945" y="3036916"/>
           <a:ext cx="6446520" cy="3873500"/>
         </p:xfrm>
         <a:graphic>
@@ -14739,7 +14739,7 @@
           </p:nvPr>
         </p:nvGraphicFramePr>
         <p:xfrm>
-          <a:off x="811086" y="1842998"/>
+          <a:off x="811086" y="1813560"/>
           <a:ext cx="7508240" cy="3873500"/>
         </p:xfrm>
         <a:graphic>
@@ -15800,7 +15800,7 @@
         </p:nvSpPr>
         <p:spPr>
           <a:xfrm>
-            <a:off x="365760" y="3384598"/>
+            <a:off x="365760" y="3482160"/>
             <a:ext cx="8412480" cy="781278"/>
           </a:xfrm>
           <a:prstGeom prst="rect">
@@ -18305,7 +18305,7 @@
           </p:nvPr>
         </p:nvGraphicFramePr>
         <p:xfrm>
-          <a:off x="1284796" y="2801048"/>
+          <a:off x="1284796" y="2600498"/>
           <a:ext cx="6560820" cy="3873500"/>
         </p:xfrm>
         <a:graphic>
@@ -18805,7 +18805,7 @@
         <p:spPr>
           <a:xfrm>
             <a:off x="365760" y="960120"/>
-            <a:ext cx="8412480" cy="1739328"/>
+            <a:ext cx="8412480" cy="1587442"/>
           </a:xfrm>
           <a:prstGeom prst="rect">
             <a:avLst/>
@@ -19177,7 +19177,7 @@
           </p:nvPr>
         </p:nvGraphicFramePr>
         <p:xfrm>
-          <a:off x="1592136" y="2801048"/>
+          <a:off x="1592136" y="2762596"/>
           <a:ext cx="5946140" cy="3873500"/>
         </p:xfrm>
         <a:graphic>
@@ -20049,7 +20049,7 @@
           </p:nvPr>
         </p:nvGraphicFramePr>
         <p:xfrm>
-          <a:off x="1270826" y="1842998"/>
+          <a:off x="1270826" y="1813560"/>
           <a:ext cx="6588760" cy="3873500"/>
         </p:xfrm>
         <a:graphic>
@@ -20703,7 +20703,7 @@
         </p:nvSpPr>
         <p:spPr>
           <a:xfrm>
-            <a:off x="365760" y="3096598"/>
+            <a:off x="365760" y="3194160"/>
             <a:ext cx="8412480" cy="781278"/>
           </a:xfrm>
           <a:prstGeom prst="rect">
@@ -20950,7 +20950,7 @@
           </p:nvPr>
         </p:nvGraphicFramePr>
         <p:xfrm>
-          <a:off x="1076516" y="1842998"/>
+          <a:off x="1076516" y="1813560"/>
           <a:ext cx="6977380" cy="3873500"/>
         </p:xfrm>
         <a:graphic>
@@ -21978,7 +21978,7 @@
           </p:nvPr>
         </p:nvGraphicFramePr>
         <p:xfrm>
-          <a:off x="1340675" y="1842998"/>
+          <a:off x="1340675" y="1813560"/>
           <a:ext cx="6449060" cy="3873500"/>
         </p:xfrm>
         <a:graphic>
@@ -22612,7 +22612,7 @@
         </p:nvSpPr>
         <p:spPr>
           <a:xfrm>
-            <a:off x="365760" y="3096598"/>
+            <a:off x="365760" y="3194160"/>
             <a:ext cx="8412480" cy="781278"/>
           </a:xfrm>
           <a:prstGeom prst="rect">
@@ -24466,7 +24466,7 @@
           </p:nvPr>
         </p:nvGraphicFramePr>
         <p:xfrm>
-          <a:off x="671386" y="2100036"/>
+          <a:off x="671386" y="2087880"/>
           <a:ext cx="7787640" cy="3873500"/>
         </p:xfrm>
         <a:graphic>
@@ -26078,7 +26078,7 @@
           </p:nvPr>
         </p:nvGraphicFramePr>
         <p:xfrm>
-          <a:off x="949515" y="1842998"/>
+          <a:off x="949515" y="1813560"/>
           <a:ext cx="7231380" cy="3873500"/>
         </p:xfrm>
         <a:graphic>
@@ -26752,7 +26752,7 @@
         </p:nvSpPr>
         <p:spPr>
           <a:xfrm>
-            <a:off x="365760" y="3096598"/>
+            <a:off x="365760" y="3194160"/>
             <a:ext cx="8412480" cy="781278"/>
           </a:xfrm>
           <a:prstGeom prst="rect">
@@ -29182,7 +29182,7 @@
           </p:nvPr>
         </p:nvGraphicFramePr>
         <p:xfrm>
-          <a:off x="868236" y="2801048"/>
+          <a:off x="868236" y="2600498"/>
           <a:ext cx="7393940" cy="3873500"/>
         </p:xfrm>
         <a:graphic>
@@ -30160,7 +30160,7 @@
         <p:spPr>
           <a:xfrm>
             <a:off x="365760" y="960120"/>
-            <a:ext cx="8412480" cy="1739328"/>
+            <a:ext cx="8412480" cy="1587442"/>
           </a:xfrm>
           <a:prstGeom prst="rect">
             <a:avLst/>
@@ -30572,7 +30572,7 @@
           </p:nvPr>
         </p:nvGraphicFramePr>
         <p:xfrm>
-          <a:off x="908875" y="2392124"/>
+          <a:off x="908875" y="2326178"/>
           <a:ext cx="7312660" cy="3873500"/>
         </p:xfrm>
         <a:graphic>
@@ -31568,7 +31568,7 @@
         </p:nvSpPr>
         <p:spPr>
           <a:xfrm>
-            <a:off x="365760" y="3645724"/>
+            <a:off x="365760" y="3706778"/>
             <a:ext cx="8412480" cy="781278"/>
           </a:xfrm>
           <a:prstGeom prst="rect">
@@ -31815,7 +31815,7 @@
           </p:nvPr>
         </p:nvGraphicFramePr>
         <p:xfrm>
-          <a:off x="1230186" y="2100036"/>
+          <a:off x="1230186" y="2087880"/>
           <a:ext cx="6670040" cy="3873500"/>
         </p:xfrm>
         <a:graphic>
@@ -32876,7 +32876,7 @@
         </p:nvSpPr>
         <p:spPr>
           <a:xfrm>
-            <a:off x="365760" y="3641636"/>
+            <a:off x="365760" y="3756480"/>
             <a:ext cx="8412480" cy="781278"/>
           </a:xfrm>
           <a:prstGeom prst="rect">
@@ -33501,7 +33501,7 @@
         </p:blipFill>
         <p:spPr>
           <a:xfrm>
-            <a:off x="3452202" y="4038939"/>
+            <a:off x="3452202" y="3936076"/>
             <a:ext cx="2239596" cy="1343269"/>
           </a:xfrm>
           <a:prstGeom prst="rect">
@@ -33690,7 +33690,7 @@
           </p:nvPr>
         </p:nvGraphicFramePr>
         <p:xfrm>
-          <a:off x="868235" y="4608774"/>
+          <a:off x="868235" y="4723618"/>
           <a:ext cx="7393940" cy="3873500"/>
         </p:xfrm>
         <a:graphic>
@@ -35148,7 +35148,7 @@
         </p:blipFill>
         <p:spPr>
           <a:xfrm>
-            <a:off x="3158436" y="2100036"/>
+            <a:off x="3158436" y="2087880"/>
             <a:ext cx="2813538" cy="2407138"/>
           </a:xfrm>
           <a:prstGeom prst="rect">

--- a/courses/ooad/sessions/s10.pptx
+++ b/courses/ooad/sessions/s10.pptx
@@ -5845,7 +5845,7 @@
                 <a:latin typeface="맑은 고딕"/>
                 <a:ea typeface="맑은 고딕"/>
               </a:rPr>
-              <a:t>이 되고, 표의 오른쪽 열에서 사라진 것은 매퍼가 복원할 때 되살린다.</a:t>
+              <a:t>이 된다. 저장하면서 사라진 의미는 매퍼가 읽을 때 되살린다.</a:t>
             </a:r>
           </a:p>
         </p:txBody>
